--- a/paper-mstid-rt/pub_figures/TID.pptx
+++ b/paper-mstid-rt/pub_figures/TID.pptx
@@ -273,7 +273,7 @@
           <a:p>
             <a:fld id="{A9382490-085F-45B0-B756-BD60DC77582D}" type="datetimeFigureOut">
               <a:rPr lang="en-US" smtClean="0"/>
-              <a:t>5/3/2025</a:t>
+              <a:t>5/7/2025</a:t>
             </a:fld>
             <a:endParaRPr lang="en-US"/>
           </a:p>
@@ -471,7 +471,7 @@
           <a:p>
             <a:fld id="{A9382490-085F-45B0-B756-BD60DC77582D}" type="datetimeFigureOut">
               <a:rPr lang="en-US" smtClean="0"/>
-              <a:t>5/3/2025</a:t>
+              <a:t>5/7/2025</a:t>
             </a:fld>
             <a:endParaRPr lang="en-US"/>
           </a:p>
@@ -679,7 +679,7 @@
           <a:p>
             <a:fld id="{A9382490-085F-45B0-B756-BD60DC77582D}" type="datetimeFigureOut">
               <a:rPr lang="en-US" smtClean="0"/>
-              <a:t>5/3/2025</a:t>
+              <a:t>5/7/2025</a:t>
             </a:fld>
             <a:endParaRPr lang="en-US"/>
           </a:p>
@@ -877,7 +877,7 @@
           <a:p>
             <a:fld id="{A9382490-085F-45B0-B756-BD60DC77582D}" type="datetimeFigureOut">
               <a:rPr lang="en-US" smtClean="0"/>
-              <a:t>5/3/2025</a:t>
+              <a:t>5/7/2025</a:t>
             </a:fld>
             <a:endParaRPr lang="en-US"/>
           </a:p>
@@ -1152,7 +1152,7 @@
           <a:p>
             <a:fld id="{A9382490-085F-45B0-B756-BD60DC77582D}" type="datetimeFigureOut">
               <a:rPr lang="en-US" smtClean="0"/>
-              <a:t>5/3/2025</a:t>
+              <a:t>5/7/2025</a:t>
             </a:fld>
             <a:endParaRPr lang="en-US"/>
           </a:p>
@@ -1417,7 +1417,7 @@
           <a:p>
             <a:fld id="{A9382490-085F-45B0-B756-BD60DC77582D}" type="datetimeFigureOut">
               <a:rPr lang="en-US" smtClean="0"/>
-              <a:t>5/3/2025</a:t>
+              <a:t>5/7/2025</a:t>
             </a:fld>
             <a:endParaRPr lang="en-US"/>
           </a:p>
@@ -1829,7 +1829,7 @@
           <a:p>
             <a:fld id="{A9382490-085F-45B0-B756-BD60DC77582D}" type="datetimeFigureOut">
               <a:rPr lang="en-US" smtClean="0"/>
-              <a:t>5/3/2025</a:t>
+              <a:t>5/7/2025</a:t>
             </a:fld>
             <a:endParaRPr lang="en-US"/>
           </a:p>
@@ -1970,7 +1970,7 @@
           <a:p>
             <a:fld id="{A9382490-085F-45B0-B756-BD60DC77582D}" type="datetimeFigureOut">
               <a:rPr lang="en-US" smtClean="0"/>
-              <a:t>5/3/2025</a:t>
+              <a:t>5/7/2025</a:t>
             </a:fld>
             <a:endParaRPr lang="en-US"/>
           </a:p>
@@ -2083,7 +2083,7 @@
           <a:p>
             <a:fld id="{A9382490-085F-45B0-B756-BD60DC77582D}" type="datetimeFigureOut">
               <a:rPr lang="en-US" smtClean="0"/>
-              <a:t>5/3/2025</a:t>
+              <a:t>5/7/2025</a:t>
             </a:fld>
             <a:endParaRPr lang="en-US"/>
           </a:p>
@@ -2394,7 +2394,7 @@
           <a:p>
             <a:fld id="{A9382490-085F-45B0-B756-BD60DC77582D}" type="datetimeFigureOut">
               <a:rPr lang="en-US" smtClean="0"/>
-              <a:t>5/3/2025</a:t>
+              <a:t>5/7/2025</a:t>
             </a:fld>
             <a:endParaRPr lang="en-US"/>
           </a:p>
@@ -2682,7 +2682,7 @@
           <a:p>
             <a:fld id="{A9382490-085F-45B0-B756-BD60DC77582D}" type="datetimeFigureOut">
               <a:rPr lang="en-US" smtClean="0"/>
-              <a:t>5/3/2025</a:t>
+              <a:t>5/7/2025</a:t>
             </a:fld>
             <a:endParaRPr lang="en-US"/>
           </a:p>
@@ -2923,7 +2923,7 @@
           <a:p>
             <a:fld id="{A9382490-085F-45B0-B756-BD60DC77582D}" type="datetimeFigureOut">
               <a:rPr lang="en-US" smtClean="0"/>
-              <a:t>5/3/2025</a:t>
+              <a:t>5/7/2025</a:t>
             </a:fld>
             <a:endParaRPr lang="en-US"/>
           </a:p>
@@ -6152,10 +6152,10 @@
       </p:grpSpPr>
       <p:grpSp>
         <p:nvGrpSpPr>
-          <p:cNvPr id="134" name="Group 133">
+          <p:cNvPr id="7" name="Group 6">
             <a:extLst>
               <a:ext uri="{FF2B5EF4-FFF2-40B4-BE49-F238E27FC236}">
-                <a16:creationId xmlns:a16="http://schemas.microsoft.com/office/drawing/2014/main" id="{1B9C9ACA-0918-C82E-46FF-0C5402968028}"/>
+                <a16:creationId xmlns:a16="http://schemas.microsoft.com/office/drawing/2014/main" id="{4DA503A4-59E5-A27F-0B6B-1BF21A2F53FA}"/>
               </a:ext>
             </a:extLst>
           </p:cNvPr>
@@ -6164,12 +6164,48 @@
         </p:nvGrpSpPr>
         <p:grpSpPr>
           <a:xfrm>
-            <a:off x="756011" y="1576968"/>
-            <a:ext cx="10395640" cy="3536150"/>
-            <a:chOff x="756011" y="1576968"/>
-            <a:chExt cx="10395640" cy="3536150"/>
+            <a:off x="-38733" y="136908"/>
+            <a:ext cx="12269465" cy="5110271"/>
+            <a:chOff x="608335" y="1497358"/>
+            <a:chExt cx="10483175" cy="4209772"/>
           </a:xfrm>
         </p:grpSpPr>
+        <p:pic>
+          <p:nvPicPr>
+            <p:cNvPr id="3" name="Picture 2" descr="A map with a number of points&#10;&#10;AI-generated content may be incorrect.">
+              <a:extLst>
+                <a:ext uri="{FF2B5EF4-FFF2-40B4-BE49-F238E27FC236}">
+                  <a16:creationId xmlns:a16="http://schemas.microsoft.com/office/drawing/2014/main" id="{BDDDC78B-B828-1F54-6B50-23CF83FC18ED}"/>
+                </a:ext>
+              </a:extLst>
+            </p:cNvPr>
+            <p:cNvPicPr>
+              <a:picLocks noChangeAspect="1"/>
+            </p:cNvPicPr>
+            <p:nvPr/>
+          </p:nvPicPr>
+          <p:blipFill>
+            <a:blip r:embed="rId2">
+              <a:extLst>
+                <a:ext uri="{28A0092B-C50C-407E-A947-70E740481C1C}">
+                  <a14:useLocalDpi xmlns:a14="http://schemas.microsoft.com/office/drawing/2010/main" val="0"/>
+                </a:ext>
+              </a:extLst>
+            </a:blip>
+            <a:stretch>
+              <a:fillRect/>
+            </a:stretch>
+          </p:blipFill>
+          <p:spPr>
+            <a:xfrm>
+              <a:off x="7660869" y="1701208"/>
+              <a:ext cx="3329103" cy="4005922"/>
+            </a:xfrm>
+            <a:prstGeom prst="rect">
+              <a:avLst/>
+            </a:prstGeom>
+          </p:spPr>
+        </p:pic>
         <p:grpSp>
           <p:nvGrpSpPr>
             <p:cNvPr id="49" name="Group 48">
@@ -7104,8 +7140,8 @@
             </p:nvSpPr>
             <p:spPr>
               <a:xfrm rot="797264">
-                <a:off x="6691238" y="2604244"/>
-                <a:ext cx="779826" cy="276999"/>
+                <a:off x="6550639" y="2558078"/>
+                <a:ext cx="1061025" cy="369332"/>
               </a:xfrm>
               <a:prstGeom prst="rect">
                 <a:avLst/>
@@ -7119,7 +7155,7 @@
               <a:lstStyle/>
               <a:p>
                 <a:r>
-                  <a:rPr lang="en-US" sz="1200" dirty="0">
+                  <a:rPr lang="en-US" dirty="0">
                     <a:latin typeface="Calibri" panose="020F0502020204030204" pitchFamily="34" charset="0"/>
                     <a:ea typeface="Calibri" panose="020F0502020204030204" pitchFamily="34" charset="0"/>
                     <a:cs typeface="Calibri" panose="020F0502020204030204" pitchFamily="34" charset="0"/>
@@ -7143,8 +7179,8 @@
             </p:nvSpPr>
             <p:spPr>
               <a:xfrm rot="714879">
-                <a:off x="6598273" y="2867620"/>
-                <a:ext cx="785745" cy="276999"/>
+                <a:off x="6456688" y="2821454"/>
+                <a:ext cx="1068917" cy="369332"/>
               </a:xfrm>
               <a:prstGeom prst="rect">
                 <a:avLst/>
@@ -7158,7 +7194,7 @@
               <a:lstStyle/>
               <a:p>
                 <a:r>
-                  <a:rPr lang="en-US" sz="1200" dirty="0">
+                  <a:rPr lang="en-US" dirty="0">
                     <a:latin typeface="Calibri" panose="020F0502020204030204" pitchFamily="34" charset="0"/>
                     <a:ea typeface="Calibri" panose="020F0502020204030204" pitchFamily="34" charset="0"/>
                     <a:cs typeface="Calibri" panose="020F0502020204030204" pitchFamily="34" charset="0"/>
@@ -7182,8 +7218,8 @@
             </p:nvSpPr>
             <p:spPr>
               <a:xfrm rot="671485">
-                <a:off x="6542565" y="3080650"/>
-                <a:ext cx="809422" cy="276999"/>
+                <a:off x="6394074" y="3034484"/>
+                <a:ext cx="1106405" cy="369332"/>
               </a:xfrm>
               <a:prstGeom prst="rect">
                 <a:avLst/>
@@ -7197,7 +7233,7 @@
               <a:lstStyle/>
               <a:p>
                 <a:r>
-                  <a:rPr lang="en-US" sz="1200" dirty="0">
+                  <a:rPr lang="en-US" dirty="0">
                     <a:latin typeface="Calibri" panose="020F0502020204030204" pitchFamily="34" charset="0"/>
                     <a:ea typeface="Calibri" panose="020F0502020204030204" pitchFamily="34" charset="0"/>
                     <a:cs typeface="Calibri" panose="020F0502020204030204" pitchFamily="34" charset="0"/>
@@ -7450,7 +7486,7 @@
             <a:noFill/>
             <a:ln>
               <a:solidFill>
-                <a:srgbClr val="FFC000"/>
+                <a:srgbClr val="0070C0"/>
               </a:solidFill>
             </a:ln>
           </p:spPr>
@@ -7712,8 +7748,8 @@
           </p:nvSpPr>
           <p:spPr>
             <a:xfrm>
-              <a:off x="3572770" y="2239145"/>
-              <a:ext cx="2229649" cy="276999"/>
+              <a:off x="3572770" y="2195601"/>
+              <a:ext cx="2060179" cy="646331"/>
             </a:xfrm>
             <a:prstGeom prst="rect">
               <a:avLst/>
@@ -7721,18 +7757,28 @@
             <a:noFill/>
           </p:spPr>
           <p:txBody>
-            <a:bodyPr wrap="none" rtlCol="0">
+            <a:bodyPr wrap="square" rtlCol="0">
               <a:spAutoFit/>
             </a:bodyPr>
             <a:lstStyle/>
             <a:p>
               <a:r>
-                <a:rPr lang="en-US" sz="1200" dirty="0">
+                <a:rPr lang="en-US" dirty="0">
                   <a:latin typeface="Calibri" panose="020F0502020204030204" pitchFamily="34" charset="0"/>
                   <a:ea typeface="Calibri" panose="020F0502020204030204" pitchFamily="34" charset="0"/>
                   <a:cs typeface="Calibri" panose="020F0502020204030204" pitchFamily="34" charset="0"/>
                 </a:rPr>
-                <a:t>Ionospheric Plasma Irregularities</a:t>
+                <a:t>Ionospheric Plasma </a:t>
+              </a:r>
+            </a:p>
+            <a:p>
+              <a:r>
+                <a:rPr lang="en-US" dirty="0">
+                  <a:latin typeface="Calibri" panose="020F0502020204030204" pitchFamily="34" charset="0"/>
+                  <a:ea typeface="Calibri" panose="020F0502020204030204" pitchFamily="34" charset="0"/>
+                  <a:cs typeface="Calibri" panose="020F0502020204030204" pitchFamily="34" charset="0"/>
+                </a:rPr>
+                <a:t>Irregularities</a:t>
               </a:r>
             </a:p>
           </p:txBody>
@@ -7760,7 +7806,7 @@
             <a:noFill/>
           </p:spPr>
           <p:txBody>
-            <a:bodyPr wrap="none" rtlCol="0">
+            <a:bodyPr wrap="square" rtlCol="0">
               <a:spAutoFit/>
             </a:bodyPr>
             <a:lstStyle/>
@@ -7790,8 +7836,8 @@
           </p:nvSpPr>
           <p:spPr>
             <a:xfrm rot="1968219">
-              <a:off x="2387443" y="3458895"/>
-              <a:ext cx="2507866" cy="276999"/>
+              <a:off x="2509944" y="3393976"/>
+              <a:ext cx="2262864" cy="646331"/>
             </a:xfrm>
             <a:prstGeom prst="rect">
               <a:avLst/>
@@ -7799,13 +7845,13 @@
             <a:noFill/>
           </p:spPr>
           <p:txBody>
-            <a:bodyPr wrap="none" rtlCol="0">
+            <a:bodyPr wrap="square" rtlCol="0">
               <a:spAutoFit/>
             </a:bodyPr>
             <a:lstStyle/>
             <a:p>
               <a:r>
-                <a:rPr lang="en-US" sz="1200" dirty="0">
+                <a:rPr lang="en-US" dirty="0">
                   <a:solidFill>
                     <a:schemeClr val="accent5">
                       <a:lumMod val="50000"/>
@@ -7815,7 +7861,22 @@
                   <a:ea typeface="Calibri" panose="020F0502020204030204" pitchFamily="34" charset="0"/>
                   <a:cs typeface="Calibri" panose="020F0502020204030204" pitchFamily="34" charset="0"/>
                 </a:rPr>
-                <a:t>Ray-1: 1-hop E-region Ground Scatter</a:t>
+                <a:t>Ray-1: 1-hop E-region </a:t>
+              </a:r>
+            </a:p>
+            <a:p>
+              <a:r>
+                <a:rPr lang="en-US" dirty="0">
+                  <a:solidFill>
+                    <a:schemeClr val="accent5">
+                      <a:lumMod val="50000"/>
+                    </a:schemeClr>
+                  </a:solidFill>
+                  <a:latin typeface="Calibri" panose="020F0502020204030204" pitchFamily="34" charset="0"/>
+                  <a:ea typeface="Calibri" panose="020F0502020204030204" pitchFamily="34" charset="0"/>
+                  <a:cs typeface="Calibri" panose="020F0502020204030204" pitchFamily="34" charset="0"/>
+                </a:rPr>
+                <a:t>Ground Scatter</a:t>
               </a:r>
             </a:p>
           </p:txBody>
@@ -7834,8 +7895,8 @@
           </p:nvSpPr>
           <p:spPr>
             <a:xfrm rot="2638120">
-              <a:off x="4047652" y="3451756"/>
-              <a:ext cx="2503058" cy="276999"/>
+              <a:off x="4138297" y="3354179"/>
+              <a:ext cx="2256452" cy="646331"/>
             </a:xfrm>
             <a:prstGeom prst="rect">
               <a:avLst/>
@@ -7843,21 +7904,34 @@
             <a:noFill/>
           </p:spPr>
           <p:txBody>
-            <a:bodyPr wrap="none" rtlCol="0">
+            <a:bodyPr wrap="square" rtlCol="0">
               <a:spAutoFit/>
             </a:bodyPr>
             <a:lstStyle/>
             <a:p>
               <a:r>
-                <a:rPr lang="en-US" sz="1200" dirty="0">
+                <a:rPr lang="en-US" dirty="0">
                   <a:solidFill>
-                    <a:srgbClr val="FFC000"/>
+                    <a:srgbClr val="0070C0"/>
                   </a:solidFill>
                   <a:latin typeface="Calibri" panose="020F0502020204030204" pitchFamily="34" charset="0"/>
                   <a:ea typeface="Calibri" panose="020F0502020204030204" pitchFamily="34" charset="0"/>
                   <a:cs typeface="Calibri" panose="020F0502020204030204" pitchFamily="34" charset="0"/>
                 </a:rPr>
-                <a:t>Ray-2: 1-hop F-region Ground Scatter</a:t>
+                <a:t>Ray-2: 1-hop F-region </a:t>
+              </a:r>
+            </a:p>
+            <a:p>
+              <a:r>
+                <a:rPr lang="en-US" dirty="0">
+                  <a:solidFill>
+                    <a:srgbClr val="0070C0"/>
+                  </a:solidFill>
+                  <a:latin typeface="Calibri" panose="020F0502020204030204" pitchFamily="34" charset="0"/>
+                  <a:ea typeface="Calibri" panose="020F0502020204030204" pitchFamily="34" charset="0"/>
+                  <a:cs typeface="Calibri" panose="020F0502020204030204" pitchFamily="34" charset="0"/>
+                </a:rPr>
+                <a:t>Ground Scatter</a:t>
               </a:r>
             </a:p>
           </p:txBody>
@@ -7876,8 +7950,8 @@
           </p:nvSpPr>
           <p:spPr>
             <a:xfrm rot="20529758">
-              <a:off x="756011" y="2521171"/>
-              <a:ext cx="2308517" cy="461665"/>
+              <a:off x="608335" y="2428838"/>
+              <a:ext cx="2277290" cy="646331"/>
             </a:xfrm>
             <a:prstGeom prst="rect">
               <a:avLst/>
@@ -7885,13 +7959,13 @@
             <a:noFill/>
           </p:spPr>
           <p:txBody>
-            <a:bodyPr wrap="none" rtlCol="0">
+            <a:bodyPr wrap="square" rtlCol="0">
               <a:spAutoFit/>
             </a:bodyPr>
             <a:lstStyle/>
             <a:p>
               <a:r>
-                <a:rPr lang="en-US" sz="1200" dirty="0">
+                <a:rPr lang="en-US" dirty="0">
                   <a:solidFill>
                     <a:srgbClr val="00B050"/>
                   </a:solidFill>
@@ -7899,12 +7973,12 @@
                   <a:ea typeface="Calibri" panose="020F0502020204030204" pitchFamily="34" charset="0"/>
                   <a:cs typeface="Calibri" panose="020F0502020204030204" pitchFamily="34" charset="0"/>
                 </a:rPr>
-                <a:t>Ray-3: ½ hop F-region Ionospheric</a:t>
+                <a:t>Ray-3: ½ hop F-region </a:t>
               </a:r>
             </a:p>
             <a:p>
               <a:r>
-                <a:rPr lang="en-US" sz="1200" dirty="0">
+                <a:rPr lang="en-US" dirty="0">
                   <a:solidFill>
                     <a:srgbClr val="00B050"/>
                   </a:solidFill>
@@ -7912,7 +7986,7 @@
                   <a:ea typeface="Calibri" panose="020F0502020204030204" pitchFamily="34" charset="0"/>
                   <a:cs typeface="Calibri" panose="020F0502020204030204" pitchFamily="34" charset="0"/>
                 </a:rPr>
-                <a:t>Scatter</a:t>
+                <a:t>Ionospheric Scatter</a:t>
               </a:r>
             </a:p>
           </p:txBody>
@@ -7978,8 +8052,8 @@
           </p:nvSpPr>
           <p:spPr>
             <a:xfrm>
-              <a:off x="2783581" y="1834652"/>
-              <a:ext cx="880369" cy="276999"/>
+              <a:off x="2575367" y="1497358"/>
+              <a:ext cx="1234633" cy="369332"/>
             </a:xfrm>
             <a:prstGeom prst="rect">
               <a:avLst/>
@@ -7987,13 +8061,13 @@
             <a:noFill/>
           </p:spPr>
           <p:txBody>
-            <a:bodyPr wrap="none" rtlCol="0">
+            <a:bodyPr wrap="square" rtlCol="0">
               <a:spAutoFit/>
             </a:bodyPr>
             <a:lstStyle/>
             <a:p>
               <a:r>
-                <a:rPr lang="en-US" sz="1200" dirty="0">
+                <a:rPr lang="en-US" dirty="0">
                   <a:latin typeface="Calibri" panose="020F0502020204030204" pitchFamily="34" charset="0"/>
                   <a:ea typeface="Calibri" panose="020F0502020204030204" pitchFamily="34" charset="0"/>
                   <a:cs typeface="Calibri" panose="020F0502020204030204" pitchFamily="34" charset="0"/>
@@ -8005,10 +8079,10 @@
         </p:sp>
         <p:grpSp>
           <p:nvGrpSpPr>
-            <p:cNvPr id="131" name="Group 130">
+            <p:cNvPr id="117" name="Group 116">
               <a:extLst>
                 <a:ext uri="{FF2B5EF4-FFF2-40B4-BE49-F238E27FC236}">
-                  <a16:creationId xmlns:a16="http://schemas.microsoft.com/office/drawing/2014/main" id="{D87CB95B-6423-828B-6AAC-899679DA341D}"/>
+                  <a16:creationId xmlns:a16="http://schemas.microsoft.com/office/drawing/2014/main" id="{03B9EBB6-F8A0-85C8-1597-44C266CC3455}"/>
                 </a:ext>
               </a:extLst>
             </p:cNvPr>
@@ -8017,289 +8091,18 @@
           </p:nvGrpSpPr>
           <p:grpSpPr>
             <a:xfrm>
-              <a:off x="7693247" y="1576968"/>
-              <a:ext cx="3458404" cy="3536150"/>
-              <a:chOff x="7693247" y="1576968"/>
-              <a:chExt cx="3458404" cy="3536150"/>
+              <a:off x="7803048" y="3044668"/>
+              <a:ext cx="1848049" cy="2068450"/>
+              <a:chOff x="7803048" y="3044668"/>
+              <a:chExt cx="1848049" cy="2068450"/>
             </a:xfrm>
           </p:grpSpPr>
-          <p:pic>
-            <p:nvPicPr>
-              <p:cNvPr id="100" name="Picture 99">
+          <p:sp>
+            <p:nvSpPr>
+              <p:cNvPr id="102" name="Arc 101">
                 <a:extLst>
                   <a:ext uri="{FF2B5EF4-FFF2-40B4-BE49-F238E27FC236}">
-                    <a16:creationId xmlns:a16="http://schemas.microsoft.com/office/drawing/2014/main" id="{CF104F01-0626-1DEB-FCEC-7FBBC5EEC2D7}"/>
-                  </a:ext>
-                </a:extLst>
-              </p:cNvPr>
-              <p:cNvPicPr>
-                <a:picLocks noChangeAspect="1"/>
-              </p:cNvPicPr>
-              <p:nvPr/>
-            </p:nvPicPr>
-            <p:blipFill>
-              <a:blip r:embed="rId2"/>
-              <a:stretch>
-                <a:fillRect/>
-              </a:stretch>
-            </p:blipFill>
-            <p:spPr>
-              <a:xfrm>
-                <a:off x="7693247" y="1576968"/>
-                <a:ext cx="3458404" cy="3301617"/>
-              </a:xfrm>
-              <a:prstGeom prst="rect">
-                <a:avLst/>
-              </a:prstGeom>
-              <a:ln>
-                <a:solidFill>
-                  <a:schemeClr val="dk1"/>
-                </a:solidFill>
-              </a:ln>
-            </p:spPr>
-          </p:pic>
-          <p:grpSp>
-            <p:nvGrpSpPr>
-              <p:cNvPr id="117" name="Group 116">
-                <a:extLst>
-                  <a:ext uri="{FF2B5EF4-FFF2-40B4-BE49-F238E27FC236}">
-                    <a16:creationId xmlns:a16="http://schemas.microsoft.com/office/drawing/2014/main" id="{03B9EBB6-F8A0-85C8-1597-44C266CC3455}"/>
-                  </a:ext>
-                </a:extLst>
-              </p:cNvPr>
-              <p:cNvGrpSpPr/>
-              <p:nvPr/>
-            </p:nvGrpSpPr>
-            <p:grpSpPr>
-              <a:xfrm>
-                <a:off x="7803048" y="3044668"/>
-                <a:ext cx="1848049" cy="2068450"/>
-                <a:chOff x="7803048" y="3044668"/>
-                <a:chExt cx="1848049" cy="2068450"/>
-              </a:xfrm>
-            </p:grpSpPr>
-            <p:sp>
-              <p:nvSpPr>
-                <p:cNvPr id="102" name="Arc 101">
-                  <a:extLst>
-                    <a:ext uri="{FF2B5EF4-FFF2-40B4-BE49-F238E27FC236}">
-                      <a16:creationId xmlns:a16="http://schemas.microsoft.com/office/drawing/2014/main" id="{E214FC43-0455-DB1C-F307-DD031146F925}"/>
-                    </a:ext>
-                  </a:extLst>
-                </p:cNvPr>
-                <p:cNvSpPr/>
-                <p:nvPr/>
-              </p:nvSpPr>
-              <p:spPr>
-                <a:xfrm>
-                  <a:off x="7996816" y="3704169"/>
-                  <a:ext cx="877594" cy="1174024"/>
-                </a:xfrm>
-                <a:prstGeom prst="arc">
-                  <a:avLst>
-                    <a:gd name="adj1" fmla="val 16200000"/>
-                    <a:gd name="adj2" fmla="val 563031"/>
-                  </a:avLst>
-                </a:prstGeom>
-                <a:ln w="28575">
-                  <a:solidFill>
-                    <a:srgbClr val="7030A0"/>
-                  </a:solidFill>
-                </a:ln>
-              </p:spPr>
-              <p:style>
-                <a:lnRef idx="2">
-                  <a:schemeClr val="accent1"/>
-                </a:lnRef>
-                <a:fillRef idx="0">
-                  <a:schemeClr val="accent1"/>
-                </a:fillRef>
-                <a:effectRef idx="1">
-                  <a:schemeClr val="accent1"/>
-                </a:effectRef>
-                <a:fontRef idx="minor">
-                  <a:schemeClr val="tx1"/>
-                </a:fontRef>
-              </p:style>
-              <p:txBody>
-                <a:bodyPr rtlCol="0" anchor="ctr"/>
-                <a:lstStyle/>
-                <a:p>
-                  <a:pPr algn="ctr"/>
-                  <a:endParaRPr lang="en-US"/>
-                </a:p>
-              </p:txBody>
-            </p:sp>
-            <p:sp>
-              <p:nvSpPr>
-                <p:cNvPr id="103" name="Arc 102">
-                  <a:extLst>
-                    <a:ext uri="{FF2B5EF4-FFF2-40B4-BE49-F238E27FC236}">
-                      <a16:creationId xmlns:a16="http://schemas.microsoft.com/office/drawing/2014/main" id="{61C44AAC-CADC-58E7-84A6-AE555CB16B04}"/>
-                    </a:ext>
-                  </a:extLst>
-                </p:cNvPr>
-                <p:cNvSpPr/>
-                <p:nvPr/>
-              </p:nvSpPr>
-              <p:spPr>
-                <a:xfrm>
-                  <a:off x="7803048" y="3044668"/>
-                  <a:ext cx="1848049" cy="2068450"/>
-                </a:xfrm>
-                <a:prstGeom prst="arc">
-                  <a:avLst>
-                    <a:gd name="adj1" fmla="val 16200000"/>
-                    <a:gd name="adj2" fmla="val 881412"/>
-                  </a:avLst>
-                </a:prstGeom>
-                <a:ln w="28575">
-                  <a:solidFill>
-                    <a:srgbClr val="7030A0"/>
-                  </a:solidFill>
-                </a:ln>
-              </p:spPr>
-              <p:style>
-                <a:lnRef idx="2">
-                  <a:schemeClr val="accent1"/>
-                </a:lnRef>
-                <a:fillRef idx="0">
-                  <a:schemeClr val="accent1"/>
-                </a:fillRef>
-                <a:effectRef idx="1">
-                  <a:schemeClr val="accent1"/>
-                </a:effectRef>
-                <a:fontRef idx="minor">
-                  <a:schemeClr val="tx1"/>
-                </a:fontRef>
-              </p:style>
-              <p:txBody>
-                <a:bodyPr rtlCol="0" anchor="ctr"/>
-                <a:lstStyle/>
-                <a:p>
-                  <a:pPr algn="ctr"/>
-                  <a:endParaRPr lang="en-US" dirty="0"/>
-                </a:p>
-              </p:txBody>
-            </p:sp>
-            <p:grpSp>
-              <p:nvGrpSpPr>
-                <p:cNvPr id="110" name="Group 109">
-                  <a:extLst>
-                    <a:ext uri="{FF2B5EF4-FFF2-40B4-BE49-F238E27FC236}">
-                      <a16:creationId xmlns:a16="http://schemas.microsoft.com/office/drawing/2014/main" id="{3E35576F-4724-7C3D-778C-92594AD732D5}"/>
-                    </a:ext>
-                  </a:extLst>
-                </p:cNvPr>
-                <p:cNvGrpSpPr/>
-                <p:nvPr/>
-              </p:nvGrpSpPr>
-              <p:grpSpPr>
-                <a:xfrm>
-                  <a:off x="8435613" y="3044668"/>
-                  <a:ext cx="1191134" cy="1318481"/>
-                  <a:chOff x="8435613" y="3044668"/>
-                  <a:chExt cx="1191134" cy="1318481"/>
-                </a:xfrm>
-              </p:grpSpPr>
-              <p:cxnSp>
-                <p:nvCxnSpPr>
-                  <p:cNvPr id="105" name="Straight Connector 104">
-                    <a:extLst>
-                      <a:ext uri="{FF2B5EF4-FFF2-40B4-BE49-F238E27FC236}">
-                        <a16:creationId xmlns:a16="http://schemas.microsoft.com/office/drawing/2014/main" id="{070AFEE0-B63C-406D-6965-4398B58CD1D6}"/>
-                      </a:ext>
-                    </a:extLst>
-                  </p:cNvPr>
-                  <p:cNvCxnSpPr>
-                    <a:cxnSpLocks/>
-                    <a:stCxn id="102" idx="0"/>
-                    <a:endCxn id="103" idx="0"/>
-                  </p:cNvCxnSpPr>
-                  <p:nvPr/>
-                </p:nvCxnSpPr>
-                <p:spPr>
-                  <a:xfrm flipV="1">
-                    <a:off x="8435613" y="3044668"/>
-                    <a:ext cx="291459" cy="659501"/>
-                  </a:xfrm>
-                  <a:prstGeom prst="line">
-                    <a:avLst/>
-                  </a:prstGeom>
-                  <a:ln w="28575">
-                    <a:solidFill>
-                      <a:srgbClr val="7030A0"/>
-                    </a:solidFill>
-                  </a:ln>
-                </p:spPr>
-                <p:style>
-                  <a:lnRef idx="2">
-                    <a:schemeClr val="accent1"/>
-                  </a:lnRef>
-                  <a:fillRef idx="0">
-                    <a:schemeClr val="accent1"/>
-                  </a:fillRef>
-                  <a:effectRef idx="1">
-                    <a:schemeClr val="accent1"/>
-                  </a:effectRef>
-                  <a:fontRef idx="minor">
-                    <a:schemeClr val="tx1"/>
-                  </a:fontRef>
-                </p:style>
-              </p:cxnSp>
-              <p:cxnSp>
-                <p:nvCxnSpPr>
-                  <p:cNvPr id="106" name="Straight Connector 105">
-                    <a:extLst>
-                      <a:ext uri="{FF2B5EF4-FFF2-40B4-BE49-F238E27FC236}">
-                        <a16:creationId xmlns:a16="http://schemas.microsoft.com/office/drawing/2014/main" id="{198A2B6C-C604-6761-4E75-5421F0603016}"/>
-                      </a:ext>
-                    </a:extLst>
-                  </p:cNvPr>
-                  <p:cNvCxnSpPr>
-                    <a:cxnSpLocks/>
-                    <a:stCxn id="102" idx="2"/>
-                    <a:endCxn id="103" idx="2"/>
-                  </p:cNvCxnSpPr>
-                  <p:nvPr/>
-                </p:nvCxnSpPr>
-                <p:spPr>
-                  <a:xfrm flipV="1">
-                    <a:off x="8871100" y="4314754"/>
-                    <a:ext cx="755647" cy="48395"/>
-                  </a:xfrm>
-                  <a:prstGeom prst="line">
-                    <a:avLst/>
-                  </a:prstGeom>
-                  <a:ln w="28575">
-                    <a:solidFill>
-                      <a:srgbClr val="7030A0"/>
-                    </a:solidFill>
-                  </a:ln>
-                </p:spPr>
-                <p:style>
-                  <a:lnRef idx="2">
-                    <a:schemeClr val="accent1"/>
-                  </a:lnRef>
-                  <a:fillRef idx="0">
-                    <a:schemeClr val="accent1"/>
-                  </a:fillRef>
-                  <a:effectRef idx="1">
-                    <a:schemeClr val="accent1"/>
-                  </a:effectRef>
-                  <a:fontRef idx="minor">
-                    <a:schemeClr val="tx1"/>
-                  </a:fontRef>
-                </p:style>
-              </p:cxnSp>
-            </p:grpSp>
-          </p:grpSp>
-          <p:sp>
-            <p:nvSpPr>
-              <p:cNvPr id="124" name="Arc 123">
-                <a:extLst>
-                  <a:ext uri="{FF2B5EF4-FFF2-40B4-BE49-F238E27FC236}">
-                    <a16:creationId xmlns:a16="http://schemas.microsoft.com/office/drawing/2014/main" id="{47F42DEB-0B75-82D6-B8E1-64B0507F614D}"/>
+                    <a16:creationId xmlns:a16="http://schemas.microsoft.com/office/drawing/2014/main" id="{E214FC43-0455-DB1C-F307-DD031146F925}"/>
                   </a:ext>
                 </a:extLst>
               </p:cNvPr>
@@ -8308,7 +8111,59 @@
             </p:nvSpPr>
             <p:spPr>
               <a:xfrm>
-                <a:off x="8520826" y="2838224"/>
+                <a:off x="7996816" y="3704169"/>
+                <a:ext cx="877594" cy="1174024"/>
+              </a:xfrm>
+              <a:prstGeom prst="arc">
+                <a:avLst>
+                  <a:gd name="adj1" fmla="val 16200000"/>
+                  <a:gd name="adj2" fmla="val 563031"/>
+                </a:avLst>
+              </a:prstGeom>
+              <a:ln w="28575">
+                <a:solidFill>
+                  <a:srgbClr val="7030A0"/>
+                </a:solidFill>
+              </a:ln>
+            </p:spPr>
+            <p:style>
+              <a:lnRef idx="2">
+                <a:schemeClr val="accent1"/>
+              </a:lnRef>
+              <a:fillRef idx="0">
+                <a:schemeClr val="accent1"/>
+              </a:fillRef>
+              <a:effectRef idx="1">
+                <a:schemeClr val="accent1"/>
+              </a:effectRef>
+              <a:fontRef idx="minor">
+                <a:schemeClr val="tx1"/>
+              </a:fontRef>
+            </p:style>
+            <p:txBody>
+              <a:bodyPr rtlCol="0" anchor="ctr"/>
+              <a:lstStyle/>
+              <a:p>
+                <a:pPr algn="ctr"/>
+                <a:endParaRPr lang="en-US"/>
+              </a:p>
+            </p:txBody>
+          </p:sp>
+          <p:sp>
+            <p:nvSpPr>
+              <p:cNvPr id="103" name="Arc 102">
+                <a:extLst>
+                  <a:ext uri="{FF2B5EF4-FFF2-40B4-BE49-F238E27FC236}">
+                    <a16:creationId xmlns:a16="http://schemas.microsoft.com/office/drawing/2014/main" id="{61C44AAC-CADC-58E7-84A6-AE555CB16B04}"/>
+                  </a:ext>
+                </a:extLst>
+              </p:cNvPr>
+              <p:cNvSpPr/>
+              <p:nvPr/>
+            </p:nvSpPr>
+            <p:spPr>
+              <a:xfrm>
+                <a:off x="7803048" y="3044668"/>
                 <a:ext cx="1848049" cy="2068450"/>
               </a:xfrm>
               <a:prstGeom prst="arc">
@@ -8319,7 +8174,7 @@
               </a:prstGeom>
               <a:ln w="28575">
                 <a:solidFill>
-                  <a:srgbClr val="FFC000"/>
+                  <a:srgbClr val="7030A0"/>
                 </a:solidFill>
               </a:ln>
             </p:spPr>
@@ -8346,148 +8201,311 @@
               </a:p>
             </p:txBody>
           </p:sp>
-          <p:sp>
-            <p:nvSpPr>
-              <p:cNvPr id="125" name="Arc 124">
+          <p:grpSp>
+            <p:nvGrpSpPr>
+              <p:cNvPr id="110" name="Group 109">
                 <a:extLst>
                   <a:ext uri="{FF2B5EF4-FFF2-40B4-BE49-F238E27FC236}">
-                    <a16:creationId xmlns:a16="http://schemas.microsoft.com/office/drawing/2014/main" id="{FBEDBCD3-5D61-E8B9-E1EA-15D58F1FC4C3}"/>
+                    <a16:creationId xmlns:a16="http://schemas.microsoft.com/office/drawing/2014/main" id="{3E35576F-4724-7C3D-778C-92594AD732D5}"/>
                   </a:ext>
                 </a:extLst>
               </p:cNvPr>
-              <p:cNvSpPr/>
+              <p:cNvGrpSpPr/>
               <p:nvPr/>
-            </p:nvSpPr>
-            <p:spPr>
+            </p:nvGrpSpPr>
+            <p:grpSpPr>
               <a:xfrm>
-                <a:off x="8032663" y="3021038"/>
-                <a:ext cx="1848049" cy="2068450"/>
+                <a:off x="8435613" y="3044668"/>
+                <a:ext cx="1191134" cy="1318481"/>
+                <a:chOff x="8435613" y="3044668"/>
+                <a:chExt cx="1191134" cy="1318481"/>
               </a:xfrm>
-              <a:prstGeom prst="arc">
-                <a:avLst>
-                  <a:gd name="adj1" fmla="val 17073580"/>
-                  <a:gd name="adj2" fmla="val 474089"/>
-                </a:avLst>
-              </a:prstGeom>
-              <a:ln w="28575">
-                <a:solidFill>
-                  <a:srgbClr val="FFC000"/>
-                </a:solidFill>
-              </a:ln>
-            </p:spPr>
-            <p:style>
-              <a:lnRef idx="2">
-                <a:schemeClr val="accent1"/>
-              </a:lnRef>
-              <a:fillRef idx="0">
-                <a:schemeClr val="accent1"/>
-              </a:fillRef>
-              <a:effectRef idx="1">
-                <a:schemeClr val="accent1"/>
-              </a:effectRef>
-              <a:fontRef idx="minor">
-                <a:schemeClr val="tx1"/>
-              </a:fontRef>
-            </p:style>
-            <p:txBody>
-              <a:bodyPr rtlCol="0" anchor="ctr"/>
-              <a:lstStyle/>
-              <a:p>
-                <a:pPr algn="ctr"/>
-                <a:endParaRPr lang="en-US" dirty="0"/>
-              </a:p>
-            </p:txBody>
-          </p:sp>
-          <p:cxnSp>
-            <p:nvCxnSpPr>
-              <p:cNvPr id="127" name="Straight Connector 126">
-                <a:extLst>
-                  <a:ext uri="{FF2B5EF4-FFF2-40B4-BE49-F238E27FC236}">
-                    <a16:creationId xmlns:a16="http://schemas.microsoft.com/office/drawing/2014/main" id="{A28ABE7B-4F67-9C3C-75D9-ADD85556D231}"/>
-                  </a:ext>
-                </a:extLst>
-              </p:cNvPr>
-              <p:cNvCxnSpPr>
-                <a:stCxn id="125" idx="0"/>
-                <a:endCxn id="124" idx="0"/>
-              </p:cNvCxnSpPr>
-              <p:nvPr/>
-            </p:nvCxnSpPr>
-            <p:spPr>
-              <a:xfrm flipV="1">
-                <a:off x="9214628" y="2838224"/>
-                <a:ext cx="230222" cy="223927"/>
-              </a:xfrm>
-              <a:prstGeom prst="line">
-                <a:avLst/>
-              </a:prstGeom>
-              <a:ln>
-                <a:solidFill>
-                  <a:srgbClr val="FFC000"/>
-                </a:solidFill>
-              </a:ln>
-            </p:spPr>
-            <p:style>
-              <a:lnRef idx="2">
-                <a:schemeClr val="accent1"/>
-              </a:lnRef>
-              <a:fillRef idx="0">
-                <a:schemeClr val="accent1"/>
-              </a:fillRef>
-              <a:effectRef idx="1">
-                <a:schemeClr val="accent1"/>
-              </a:effectRef>
-              <a:fontRef idx="minor">
-                <a:schemeClr val="tx1"/>
-              </a:fontRef>
-            </p:style>
-          </p:cxnSp>
-          <p:cxnSp>
-            <p:nvCxnSpPr>
-              <p:cNvPr id="128" name="Straight Connector 127">
-                <a:extLst>
-                  <a:ext uri="{FF2B5EF4-FFF2-40B4-BE49-F238E27FC236}">
-                    <a16:creationId xmlns:a16="http://schemas.microsoft.com/office/drawing/2014/main" id="{F71293CB-1E86-EB72-BCE5-6F660D00A867}"/>
-                  </a:ext>
-                </a:extLst>
-              </p:cNvPr>
-              <p:cNvCxnSpPr>
-                <a:cxnSpLocks/>
-                <a:stCxn id="125" idx="2"/>
-                <a:endCxn id="124" idx="2"/>
-              </p:cNvCxnSpPr>
-              <p:nvPr/>
-            </p:nvCxnSpPr>
-            <p:spPr>
-              <a:xfrm flipV="1">
-                <a:off x="9873689" y="4108310"/>
-                <a:ext cx="470836" cy="74222"/>
-              </a:xfrm>
-              <a:prstGeom prst="line">
-                <a:avLst/>
-              </a:prstGeom>
-              <a:ln>
-                <a:solidFill>
-                  <a:srgbClr val="FFC000"/>
-                </a:solidFill>
-              </a:ln>
-            </p:spPr>
-            <p:style>
-              <a:lnRef idx="2">
-                <a:schemeClr val="accent1"/>
-              </a:lnRef>
-              <a:fillRef idx="0">
-                <a:schemeClr val="accent1"/>
-              </a:fillRef>
-              <a:effectRef idx="1">
-                <a:schemeClr val="accent1"/>
-              </a:effectRef>
-              <a:fontRef idx="minor">
-                <a:schemeClr val="tx1"/>
-              </a:fontRef>
-            </p:style>
-          </p:cxnSp>
+            </p:grpSpPr>
+            <p:cxnSp>
+              <p:nvCxnSpPr>
+                <p:cNvPr id="105" name="Straight Connector 104">
+                  <a:extLst>
+                    <a:ext uri="{FF2B5EF4-FFF2-40B4-BE49-F238E27FC236}">
+                      <a16:creationId xmlns:a16="http://schemas.microsoft.com/office/drawing/2014/main" id="{070AFEE0-B63C-406D-6965-4398B58CD1D6}"/>
+                    </a:ext>
+                  </a:extLst>
+                </p:cNvPr>
+                <p:cNvCxnSpPr>
+                  <a:cxnSpLocks/>
+                  <a:stCxn id="102" idx="0"/>
+                  <a:endCxn id="103" idx="0"/>
+                </p:cNvCxnSpPr>
+                <p:nvPr/>
+              </p:nvCxnSpPr>
+              <p:spPr>
+                <a:xfrm flipV="1">
+                  <a:off x="8435613" y="3044668"/>
+                  <a:ext cx="291459" cy="659501"/>
+                </a:xfrm>
+                <a:prstGeom prst="line">
+                  <a:avLst/>
+                </a:prstGeom>
+                <a:ln w="28575">
+                  <a:solidFill>
+                    <a:srgbClr val="7030A0"/>
+                  </a:solidFill>
+                </a:ln>
+              </p:spPr>
+              <p:style>
+                <a:lnRef idx="2">
+                  <a:schemeClr val="accent1"/>
+                </a:lnRef>
+                <a:fillRef idx="0">
+                  <a:schemeClr val="accent1"/>
+                </a:fillRef>
+                <a:effectRef idx="1">
+                  <a:schemeClr val="accent1"/>
+                </a:effectRef>
+                <a:fontRef idx="minor">
+                  <a:schemeClr val="tx1"/>
+                </a:fontRef>
+              </p:style>
+            </p:cxnSp>
+            <p:cxnSp>
+              <p:nvCxnSpPr>
+                <p:cNvPr id="106" name="Straight Connector 105">
+                  <a:extLst>
+                    <a:ext uri="{FF2B5EF4-FFF2-40B4-BE49-F238E27FC236}">
+                      <a16:creationId xmlns:a16="http://schemas.microsoft.com/office/drawing/2014/main" id="{198A2B6C-C604-6761-4E75-5421F0603016}"/>
+                    </a:ext>
+                  </a:extLst>
+                </p:cNvPr>
+                <p:cNvCxnSpPr>
+                  <a:cxnSpLocks/>
+                  <a:stCxn id="102" idx="2"/>
+                  <a:endCxn id="103" idx="2"/>
+                </p:cNvCxnSpPr>
+                <p:nvPr/>
+              </p:nvCxnSpPr>
+              <p:spPr>
+                <a:xfrm flipV="1">
+                  <a:off x="8871100" y="4314754"/>
+                  <a:ext cx="755647" cy="48395"/>
+                </a:xfrm>
+                <a:prstGeom prst="line">
+                  <a:avLst/>
+                </a:prstGeom>
+                <a:ln w="28575">
+                  <a:solidFill>
+                    <a:srgbClr val="7030A0"/>
+                  </a:solidFill>
+                </a:ln>
+              </p:spPr>
+              <p:style>
+                <a:lnRef idx="2">
+                  <a:schemeClr val="accent1"/>
+                </a:lnRef>
+                <a:fillRef idx="0">
+                  <a:schemeClr val="accent1"/>
+                </a:fillRef>
+                <a:effectRef idx="1">
+                  <a:schemeClr val="accent1"/>
+                </a:effectRef>
+                <a:fontRef idx="minor">
+                  <a:schemeClr val="tx1"/>
+                </a:fontRef>
+              </p:style>
+            </p:cxnSp>
+          </p:grpSp>
         </p:grpSp>
+        <p:sp>
+          <p:nvSpPr>
+            <p:cNvPr id="124" name="Arc 123">
+              <a:extLst>
+                <a:ext uri="{FF2B5EF4-FFF2-40B4-BE49-F238E27FC236}">
+                  <a16:creationId xmlns:a16="http://schemas.microsoft.com/office/drawing/2014/main" id="{47F42DEB-0B75-82D6-B8E1-64B0507F614D}"/>
+                </a:ext>
+              </a:extLst>
+            </p:cNvPr>
+            <p:cNvSpPr/>
+            <p:nvPr/>
+          </p:nvSpPr>
+          <p:spPr>
+            <a:xfrm>
+              <a:off x="8520826" y="2838224"/>
+              <a:ext cx="1848049" cy="2068450"/>
+            </a:xfrm>
+            <a:prstGeom prst="arc">
+              <a:avLst>
+                <a:gd name="adj1" fmla="val 16200000"/>
+                <a:gd name="adj2" fmla="val 881412"/>
+              </a:avLst>
+            </a:prstGeom>
+            <a:ln w="28575">
+              <a:solidFill>
+                <a:srgbClr val="0070C0"/>
+              </a:solidFill>
+            </a:ln>
+          </p:spPr>
+          <p:style>
+            <a:lnRef idx="2">
+              <a:schemeClr val="accent1"/>
+            </a:lnRef>
+            <a:fillRef idx="0">
+              <a:schemeClr val="accent1"/>
+            </a:fillRef>
+            <a:effectRef idx="1">
+              <a:schemeClr val="accent1"/>
+            </a:effectRef>
+            <a:fontRef idx="minor">
+              <a:schemeClr val="tx1"/>
+            </a:fontRef>
+          </p:style>
+          <p:txBody>
+            <a:bodyPr rtlCol="0" anchor="ctr"/>
+            <a:lstStyle/>
+            <a:p>
+              <a:pPr algn="ctr"/>
+              <a:endParaRPr lang="en-US" dirty="0"/>
+            </a:p>
+          </p:txBody>
+        </p:sp>
+        <p:sp>
+          <p:nvSpPr>
+            <p:cNvPr id="125" name="Arc 124">
+              <a:extLst>
+                <a:ext uri="{FF2B5EF4-FFF2-40B4-BE49-F238E27FC236}">
+                  <a16:creationId xmlns:a16="http://schemas.microsoft.com/office/drawing/2014/main" id="{FBEDBCD3-5D61-E8B9-E1EA-15D58F1FC4C3}"/>
+                </a:ext>
+              </a:extLst>
+            </p:cNvPr>
+            <p:cNvSpPr/>
+            <p:nvPr/>
+          </p:nvSpPr>
+          <p:spPr>
+            <a:xfrm>
+              <a:off x="8032663" y="3021038"/>
+              <a:ext cx="1848049" cy="2068450"/>
+            </a:xfrm>
+            <a:prstGeom prst="arc">
+              <a:avLst>
+                <a:gd name="adj1" fmla="val 17073580"/>
+                <a:gd name="adj2" fmla="val 474089"/>
+              </a:avLst>
+            </a:prstGeom>
+            <a:ln w="28575">
+              <a:solidFill>
+                <a:srgbClr val="0070C0"/>
+              </a:solidFill>
+            </a:ln>
+          </p:spPr>
+          <p:style>
+            <a:lnRef idx="2">
+              <a:schemeClr val="accent1"/>
+            </a:lnRef>
+            <a:fillRef idx="0">
+              <a:schemeClr val="accent1"/>
+            </a:fillRef>
+            <a:effectRef idx="1">
+              <a:schemeClr val="accent1"/>
+            </a:effectRef>
+            <a:fontRef idx="minor">
+              <a:schemeClr val="tx1"/>
+            </a:fontRef>
+          </p:style>
+          <p:txBody>
+            <a:bodyPr rtlCol="0" anchor="ctr"/>
+            <a:lstStyle/>
+            <a:p>
+              <a:pPr algn="ctr"/>
+              <a:endParaRPr lang="en-US" dirty="0"/>
+            </a:p>
+          </p:txBody>
+        </p:sp>
+        <p:cxnSp>
+          <p:nvCxnSpPr>
+            <p:cNvPr id="127" name="Straight Connector 126">
+              <a:extLst>
+                <a:ext uri="{FF2B5EF4-FFF2-40B4-BE49-F238E27FC236}">
+                  <a16:creationId xmlns:a16="http://schemas.microsoft.com/office/drawing/2014/main" id="{A28ABE7B-4F67-9C3C-75D9-ADD85556D231}"/>
+                </a:ext>
+              </a:extLst>
+            </p:cNvPr>
+            <p:cNvCxnSpPr>
+              <a:stCxn id="125" idx="0"/>
+              <a:endCxn id="124" idx="0"/>
+            </p:cNvCxnSpPr>
+            <p:nvPr/>
+          </p:nvCxnSpPr>
+          <p:spPr>
+            <a:xfrm flipV="1">
+              <a:off x="9214628" y="2838224"/>
+              <a:ext cx="230222" cy="223927"/>
+            </a:xfrm>
+            <a:prstGeom prst="line">
+              <a:avLst/>
+            </a:prstGeom>
+            <a:ln>
+              <a:solidFill>
+                <a:srgbClr val="0070C0"/>
+              </a:solidFill>
+            </a:ln>
+          </p:spPr>
+          <p:style>
+            <a:lnRef idx="2">
+              <a:schemeClr val="accent1"/>
+            </a:lnRef>
+            <a:fillRef idx="0">
+              <a:schemeClr val="accent1"/>
+            </a:fillRef>
+            <a:effectRef idx="1">
+              <a:schemeClr val="accent1"/>
+            </a:effectRef>
+            <a:fontRef idx="minor">
+              <a:schemeClr val="tx1"/>
+            </a:fontRef>
+          </p:style>
+        </p:cxnSp>
+        <p:cxnSp>
+          <p:nvCxnSpPr>
+            <p:cNvPr id="128" name="Straight Connector 127">
+              <a:extLst>
+                <a:ext uri="{FF2B5EF4-FFF2-40B4-BE49-F238E27FC236}">
+                  <a16:creationId xmlns:a16="http://schemas.microsoft.com/office/drawing/2014/main" id="{F71293CB-1E86-EB72-BCE5-6F660D00A867}"/>
+                </a:ext>
+              </a:extLst>
+            </p:cNvPr>
+            <p:cNvCxnSpPr>
+              <a:cxnSpLocks/>
+              <a:stCxn id="125" idx="2"/>
+              <a:endCxn id="124" idx="2"/>
+            </p:cNvCxnSpPr>
+            <p:nvPr/>
+          </p:nvCxnSpPr>
+          <p:spPr>
+            <a:xfrm flipV="1">
+              <a:off x="9873689" y="4108310"/>
+              <a:ext cx="470836" cy="74222"/>
+            </a:xfrm>
+            <a:prstGeom prst="line">
+              <a:avLst/>
+            </a:prstGeom>
+            <a:ln>
+              <a:solidFill>
+                <a:srgbClr val="0070C0"/>
+              </a:solidFill>
+            </a:ln>
+          </p:spPr>
+          <p:style>
+            <a:lnRef idx="2">
+              <a:schemeClr val="accent1"/>
+            </a:lnRef>
+            <a:fillRef idx="0">
+              <a:schemeClr val="accent1"/>
+            </a:fillRef>
+            <a:effectRef idx="1">
+              <a:schemeClr val="accent1"/>
+            </a:effectRef>
+            <a:fontRef idx="minor">
+              <a:schemeClr val="tx1"/>
+            </a:fontRef>
+          </p:style>
+        </p:cxnSp>
         <p:sp>
           <p:nvSpPr>
             <p:cNvPr id="132" name="TextBox 131">
@@ -8511,7 +8529,7 @@
             <a:noFill/>
           </p:spPr>
           <p:txBody>
-            <a:bodyPr wrap="none" rtlCol="0">
+            <a:bodyPr wrap="square" rtlCol="0">
               <a:spAutoFit/>
             </a:bodyPr>
             <a:lstStyle/>
@@ -8546,7 +8564,7 @@
             <a:noFill/>
           </p:spPr>
           <p:txBody>
-            <a:bodyPr wrap="none" rtlCol="0">
+            <a:bodyPr wrap="square" rtlCol="0">
               <a:spAutoFit/>
             </a:bodyPr>
             <a:lstStyle/>
@@ -8554,6 +8572,104 @@
               <a:r>
                 <a:rPr lang="en-US" dirty="0"/>
                 <a:t>(B)</a:t>
+              </a:r>
+            </a:p>
+          </p:txBody>
+        </p:sp>
+        <p:sp>
+          <p:nvSpPr>
+            <p:cNvPr id="4" name="TextBox 3">
+              <a:extLst>
+                <a:ext uri="{FF2B5EF4-FFF2-40B4-BE49-F238E27FC236}">
+                  <a16:creationId xmlns:a16="http://schemas.microsoft.com/office/drawing/2014/main" id="{E761CFD1-82CD-BC64-1AD6-117ADA0FA564}"/>
+                </a:ext>
+              </a:extLst>
+            </p:cNvPr>
+            <p:cNvSpPr txBox="1"/>
+            <p:nvPr/>
+          </p:nvSpPr>
+          <p:spPr>
+            <a:xfrm>
+              <a:off x="7720613" y="3668423"/>
+              <a:ext cx="1079398" cy="646331"/>
+            </a:xfrm>
+            <a:prstGeom prst="rect">
+              <a:avLst/>
+            </a:prstGeom>
+            <a:noFill/>
+          </p:spPr>
+          <p:txBody>
+            <a:bodyPr wrap="square" rtlCol="0">
+              <a:spAutoFit/>
+            </a:bodyPr>
+            <a:lstStyle/>
+            <a:p>
+              <a:r>
+                <a:rPr lang="en-US" dirty="0">
+                  <a:solidFill>
+                    <a:srgbClr val="FF0000"/>
+                  </a:solidFill>
+                </a:rPr>
+                <a:t>1-hop </a:t>
+              </a:r>
+            </a:p>
+            <a:p>
+              <a:r>
+                <a:rPr lang="en-US" dirty="0">
+                  <a:solidFill>
+                    <a:srgbClr val="FF0000"/>
+                  </a:solidFill>
+                </a:rPr>
+                <a:t>E Scatter</a:t>
+              </a:r>
+            </a:p>
+          </p:txBody>
+        </p:sp>
+        <p:sp>
+          <p:nvSpPr>
+            <p:cNvPr id="5" name="TextBox 4">
+              <a:extLst>
+                <a:ext uri="{FF2B5EF4-FFF2-40B4-BE49-F238E27FC236}">
+                  <a16:creationId xmlns:a16="http://schemas.microsoft.com/office/drawing/2014/main" id="{8CA39408-D38D-2F2B-2176-6D5D62F74FE7}"/>
+                </a:ext>
+              </a:extLst>
+            </p:cNvPr>
+            <p:cNvSpPr txBox="1"/>
+            <p:nvPr/>
+          </p:nvSpPr>
+          <p:spPr>
+            <a:xfrm>
+              <a:off x="10018524" y="2596447"/>
+              <a:ext cx="1072986" cy="646331"/>
+            </a:xfrm>
+            <a:prstGeom prst="rect">
+              <a:avLst/>
+            </a:prstGeom>
+            <a:noFill/>
+          </p:spPr>
+          <p:txBody>
+            <a:bodyPr wrap="square" rtlCol="0">
+              <a:spAutoFit/>
+            </a:bodyPr>
+            <a:lstStyle/>
+            <a:p>
+              <a:r>
+                <a:rPr lang="en-US" dirty="0">
+                  <a:solidFill>
+                    <a:srgbClr val="FF0000"/>
+                  </a:solidFill>
+                </a:rPr>
+                <a:t>1-hop </a:t>
+              </a:r>
+            </a:p>
+            <a:p>
+              <a:r>
+                <a:rPr lang="en-US" dirty="0">
+                  <a:solidFill>
+                    <a:srgbClr val="FF0000"/>
+                  </a:solidFill>
+                </a:rPr>
+                <a:t>F Scatter</a:t>
               </a:r>
             </a:p>
           </p:txBody>

--- a/paper-mstid-rt/pub_figures/TID.pptx
+++ b/paper-mstid-rt/pub_figures/TID.pptx
@@ -273,7 +273,7 @@
           <a:p>
             <a:fld id="{A9382490-085F-45B0-B756-BD60DC77582D}" type="datetimeFigureOut">
               <a:rPr lang="en-US" smtClean="0"/>
-              <a:t>5/7/2025</a:t>
+              <a:t>5/14/2025</a:t>
             </a:fld>
             <a:endParaRPr lang="en-US"/>
           </a:p>
@@ -471,7 +471,7 @@
           <a:p>
             <a:fld id="{A9382490-085F-45B0-B756-BD60DC77582D}" type="datetimeFigureOut">
               <a:rPr lang="en-US" smtClean="0"/>
-              <a:t>5/7/2025</a:t>
+              <a:t>5/14/2025</a:t>
             </a:fld>
             <a:endParaRPr lang="en-US"/>
           </a:p>
@@ -679,7 +679,7 @@
           <a:p>
             <a:fld id="{A9382490-085F-45B0-B756-BD60DC77582D}" type="datetimeFigureOut">
               <a:rPr lang="en-US" smtClean="0"/>
-              <a:t>5/7/2025</a:t>
+              <a:t>5/14/2025</a:t>
             </a:fld>
             <a:endParaRPr lang="en-US"/>
           </a:p>
@@ -877,7 +877,7 @@
           <a:p>
             <a:fld id="{A9382490-085F-45B0-B756-BD60DC77582D}" type="datetimeFigureOut">
               <a:rPr lang="en-US" smtClean="0"/>
-              <a:t>5/7/2025</a:t>
+              <a:t>5/14/2025</a:t>
             </a:fld>
             <a:endParaRPr lang="en-US"/>
           </a:p>
@@ -1152,7 +1152,7 @@
           <a:p>
             <a:fld id="{A9382490-085F-45B0-B756-BD60DC77582D}" type="datetimeFigureOut">
               <a:rPr lang="en-US" smtClean="0"/>
-              <a:t>5/7/2025</a:t>
+              <a:t>5/14/2025</a:t>
             </a:fld>
             <a:endParaRPr lang="en-US"/>
           </a:p>
@@ -1417,7 +1417,7 @@
           <a:p>
             <a:fld id="{A9382490-085F-45B0-B756-BD60DC77582D}" type="datetimeFigureOut">
               <a:rPr lang="en-US" smtClean="0"/>
-              <a:t>5/7/2025</a:t>
+              <a:t>5/14/2025</a:t>
             </a:fld>
             <a:endParaRPr lang="en-US"/>
           </a:p>
@@ -1829,7 +1829,7 @@
           <a:p>
             <a:fld id="{A9382490-085F-45B0-B756-BD60DC77582D}" type="datetimeFigureOut">
               <a:rPr lang="en-US" smtClean="0"/>
-              <a:t>5/7/2025</a:t>
+              <a:t>5/14/2025</a:t>
             </a:fld>
             <a:endParaRPr lang="en-US"/>
           </a:p>
@@ -1970,7 +1970,7 @@
           <a:p>
             <a:fld id="{A9382490-085F-45B0-B756-BD60DC77582D}" type="datetimeFigureOut">
               <a:rPr lang="en-US" smtClean="0"/>
-              <a:t>5/7/2025</a:t>
+              <a:t>5/14/2025</a:t>
             </a:fld>
             <a:endParaRPr lang="en-US"/>
           </a:p>
@@ -2083,7 +2083,7 @@
           <a:p>
             <a:fld id="{A9382490-085F-45B0-B756-BD60DC77582D}" type="datetimeFigureOut">
               <a:rPr lang="en-US" smtClean="0"/>
-              <a:t>5/7/2025</a:t>
+              <a:t>5/14/2025</a:t>
             </a:fld>
             <a:endParaRPr lang="en-US"/>
           </a:p>
@@ -2394,7 +2394,7 @@
           <a:p>
             <a:fld id="{A9382490-085F-45B0-B756-BD60DC77582D}" type="datetimeFigureOut">
               <a:rPr lang="en-US" smtClean="0"/>
-              <a:t>5/7/2025</a:t>
+              <a:t>5/14/2025</a:t>
             </a:fld>
             <a:endParaRPr lang="en-US"/>
           </a:p>
@@ -2682,7 +2682,7 @@
           <a:p>
             <a:fld id="{A9382490-085F-45B0-B756-BD60DC77582D}" type="datetimeFigureOut">
               <a:rPr lang="en-US" smtClean="0"/>
-              <a:t>5/7/2025</a:t>
+              <a:t>5/14/2025</a:t>
             </a:fld>
             <a:endParaRPr lang="en-US"/>
           </a:p>
@@ -2923,7 +2923,7 @@
           <a:p>
             <a:fld id="{A9382490-085F-45B0-B756-BD60DC77582D}" type="datetimeFigureOut">
               <a:rPr lang="en-US" smtClean="0"/>
-              <a:t>5/7/2025</a:t>
+              <a:t>5/14/2025</a:t>
             </a:fld>
             <a:endParaRPr lang="en-US"/>
           </a:p>
@@ -8707,10 +8707,10 @@
       </p:grpSpPr>
       <p:grpSp>
         <p:nvGrpSpPr>
-          <p:cNvPr id="10" name="Group 9">
+          <p:cNvPr id="4" name="Group 3">
             <a:extLst>
               <a:ext uri="{FF2B5EF4-FFF2-40B4-BE49-F238E27FC236}">
-                <a16:creationId xmlns:a16="http://schemas.microsoft.com/office/drawing/2014/main" id="{9F6F5A37-C517-2B9E-75A3-B6FC60616EBF}"/>
+                <a16:creationId xmlns:a16="http://schemas.microsoft.com/office/drawing/2014/main" id="{D094CE38-8A8B-83FD-046C-E88389DF307C}"/>
               </a:ext>
             </a:extLst>
           </p:cNvPr>
@@ -8727,10 +8727,10 @@
         </p:grpSpPr>
         <p:pic>
           <p:nvPicPr>
-            <p:cNvPr id="5" name="Picture 4" descr="A screenshot of a graph&#10;&#10;AI-generated content may be incorrect.">
+            <p:cNvPr id="3" name="Picture 2" descr="A screenshot of a graph&#10;&#10;AI-generated content may be incorrect.">
               <a:extLst>
                 <a:ext uri="{FF2B5EF4-FFF2-40B4-BE49-F238E27FC236}">
-                  <a16:creationId xmlns:a16="http://schemas.microsoft.com/office/drawing/2014/main" id="{C60B4593-0521-A84B-6615-A01524CC3ABC}"/>
+                  <a16:creationId xmlns:a16="http://schemas.microsoft.com/office/drawing/2014/main" id="{970826CE-2322-7881-C651-184A1529D5C2}"/>
                 </a:ext>
               </a:extLst>
             </p:cNvPr>
@@ -8761,453 +8761,474 @@
             </a:prstGeom>
           </p:spPr>
         </p:pic>
-        <p:sp>
-          <p:nvSpPr>
-            <p:cNvPr id="6" name="Freeform: Shape 5">
+        <p:grpSp>
+          <p:nvGrpSpPr>
+            <p:cNvPr id="10" name="Group 9">
               <a:extLst>
                 <a:ext uri="{FF2B5EF4-FFF2-40B4-BE49-F238E27FC236}">
-                  <a16:creationId xmlns:a16="http://schemas.microsoft.com/office/drawing/2014/main" id="{DADF6E9C-FF60-3E2A-D893-13C5881795E0}"/>
+                  <a16:creationId xmlns:a16="http://schemas.microsoft.com/office/drawing/2014/main" id="{9F6F5A37-C517-2B9E-75A3-B6FC60616EBF}"/>
                 </a:ext>
               </a:extLst>
             </p:cNvPr>
-            <p:cNvSpPr/>
+            <p:cNvGrpSpPr/>
             <p:nvPr/>
-          </p:nvSpPr>
-          <p:spPr>
+          </p:nvGrpSpPr>
+          <p:grpSpPr>
             <a:xfrm>
               <a:off x="3222171" y="1600200"/>
-              <a:ext cx="4626429" cy="664423"/>
+              <a:ext cx="4626429" cy="2974709"/>
+              <a:chOff x="3222171" y="1600200"/>
+              <a:chExt cx="4626429" cy="2974709"/>
             </a:xfrm>
-            <a:custGeom>
-              <a:avLst/>
-              <a:gdLst>
-                <a:gd name="connsiteX0" fmla="*/ 0 w 4626429"/>
-                <a:gd name="connsiteY0" fmla="*/ 446314 h 664423"/>
-                <a:gd name="connsiteX1" fmla="*/ 326572 w 4626429"/>
-                <a:gd name="connsiteY1" fmla="*/ 620486 h 664423"/>
-                <a:gd name="connsiteX2" fmla="*/ 827315 w 4626429"/>
-                <a:gd name="connsiteY2" fmla="*/ 326571 h 664423"/>
-                <a:gd name="connsiteX3" fmla="*/ 1143000 w 4626429"/>
-                <a:gd name="connsiteY3" fmla="*/ 468086 h 664423"/>
-                <a:gd name="connsiteX4" fmla="*/ 1643743 w 4626429"/>
-                <a:gd name="connsiteY4" fmla="*/ 370114 h 664423"/>
-                <a:gd name="connsiteX5" fmla="*/ 1948543 w 4626429"/>
-                <a:gd name="connsiteY5" fmla="*/ 664029 h 664423"/>
-                <a:gd name="connsiteX6" fmla="*/ 2656115 w 4626429"/>
-                <a:gd name="connsiteY6" fmla="*/ 435429 h 664423"/>
-                <a:gd name="connsiteX7" fmla="*/ 3124200 w 4626429"/>
-                <a:gd name="connsiteY7" fmla="*/ 533400 h 664423"/>
-                <a:gd name="connsiteX8" fmla="*/ 3494315 w 4626429"/>
-                <a:gd name="connsiteY8" fmla="*/ 413657 h 664423"/>
-                <a:gd name="connsiteX9" fmla="*/ 3799115 w 4626429"/>
-                <a:gd name="connsiteY9" fmla="*/ 489857 h 664423"/>
-                <a:gd name="connsiteX10" fmla="*/ 4114800 w 4626429"/>
-                <a:gd name="connsiteY10" fmla="*/ 489857 h 664423"/>
-                <a:gd name="connsiteX11" fmla="*/ 4626429 w 4626429"/>
-                <a:gd name="connsiteY11" fmla="*/ 0 h 664423"/>
-              </a:gdLst>
-              <a:ahLst/>
-              <a:cxnLst>
-                <a:cxn ang="0">
-                  <a:pos x="connsiteX0" y="connsiteY0"/>
-                </a:cxn>
-                <a:cxn ang="0">
-                  <a:pos x="connsiteX1" y="connsiteY1"/>
-                </a:cxn>
-                <a:cxn ang="0">
-                  <a:pos x="connsiteX2" y="connsiteY2"/>
-                </a:cxn>
-                <a:cxn ang="0">
-                  <a:pos x="connsiteX3" y="connsiteY3"/>
-                </a:cxn>
-                <a:cxn ang="0">
-                  <a:pos x="connsiteX4" y="connsiteY4"/>
-                </a:cxn>
-                <a:cxn ang="0">
-                  <a:pos x="connsiteX5" y="connsiteY5"/>
-                </a:cxn>
-                <a:cxn ang="0">
-                  <a:pos x="connsiteX6" y="connsiteY6"/>
-                </a:cxn>
-                <a:cxn ang="0">
-                  <a:pos x="connsiteX7" y="connsiteY7"/>
-                </a:cxn>
-                <a:cxn ang="0">
-                  <a:pos x="connsiteX8" y="connsiteY8"/>
-                </a:cxn>
-                <a:cxn ang="0">
-                  <a:pos x="connsiteX9" y="connsiteY9"/>
-                </a:cxn>
-                <a:cxn ang="0">
-                  <a:pos x="connsiteX10" y="connsiteY10"/>
-                </a:cxn>
-                <a:cxn ang="0">
-                  <a:pos x="connsiteX11" y="connsiteY11"/>
-                </a:cxn>
-              </a:cxnLst>
-              <a:rect l="l" t="t" r="r" b="b"/>
-              <a:pathLst>
-                <a:path w="4626429" h="664423">
-                  <a:moveTo>
-                    <a:pt x="0" y="446314"/>
-                  </a:moveTo>
-                  <a:cubicBezTo>
-                    <a:pt x="94343" y="543378"/>
-                    <a:pt x="188686" y="640443"/>
-                    <a:pt x="326572" y="620486"/>
-                  </a:cubicBezTo>
-                  <a:cubicBezTo>
-                    <a:pt x="464458" y="600529"/>
-                    <a:pt x="691244" y="351971"/>
-                    <a:pt x="827315" y="326571"/>
-                  </a:cubicBezTo>
-                  <a:cubicBezTo>
-                    <a:pt x="963386" y="301171"/>
-                    <a:pt x="1006929" y="460829"/>
-                    <a:pt x="1143000" y="468086"/>
-                  </a:cubicBezTo>
-                  <a:cubicBezTo>
-                    <a:pt x="1279071" y="475343"/>
-                    <a:pt x="1509486" y="337457"/>
-                    <a:pt x="1643743" y="370114"/>
-                  </a:cubicBezTo>
-                  <a:cubicBezTo>
-                    <a:pt x="1778000" y="402771"/>
-                    <a:pt x="1779815" y="653143"/>
-                    <a:pt x="1948543" y="664029"/>
-                  </a:cubicBezTo>
-                  <a:cubicBezTo>
-                    <a:pt x="2117271" y="674915"/>
-                    <a:pt x="2460172" y="457200"/>
-                    <a:pt x="2656115" y="435429"/>
-                  </a:cubicBezTo>
-                  <a:cubicBezTo>
-                    <a:pt x="2852058" y="413658"/>
-                    <a:pt x="2984500" y="537029"/>
-                    <a:pt x="3124200" y="533400"/>
-                  </a:cubicBezTo>
-                  <a:cubicBezTo>
-                    <a:pt x="3263900" y="529771"/>
-                    <a:pt x="3381829" y="420914"/>
-                    <a:pt x="3494315" y="413657"/>
-                  </a:cubicBezTo>
-                  <a:cubicBezTo>
-                    <a:pt x="3606801" y="406400"/>
-                    <a:pt x="3695701" y="477157"/>
-                    <a:pt x="3799115" y="489857"/>
-                  </a:cubicBezTo>
-                  <a:cubicBezTo>
-                    <a:pt x="3902529" y="502557"/>
-                    <a:pt x="3976914" y="571500"/>
-                    <a:pt x="4114800" y="489857"/>
-                  </a:cubicBezTo>
-                  <a:cubicBezTo>
-                    <a:pt x="4252686" y="408214"/>
-                    <a:pt x="4439557" y="204107"/>
-                    <a:pt x="4626429" y="0"/>
-                  </a:cubicBezTo>
-                </a:path>
-              </a:pathLst>
-            </a:custGeom>
-            <a:ln w="38100">
-              <a:solidFill>
-                <a:srgbClr val="92D050"/>
-              </a:solidFill>
-            </a:ln>
-          </p:spPr>
-          <p:style>
-            <a:lnRef idx="3">
-              <a:schemeClr val="accent1"/>
-            </a:lnRef>
-            <a:fillRef idx="0">
-              <a:schemeClr val="accent1"/>
-            </a:fillRef>
-            <a:effectRef idx="2">
-              <a:schemeClr val="accent1"/>
-            </a:effectRef>
-            <a:fontRef idx="minor">
-              <a:schemeClr val="tx1"/>
-            </a:fontRef>
-          </p:style>
-          <p:txBody>
-            <a:bodyPr rtlCol="0" anchor="ctr"/>
-            <a:lstStyle/>
-            <a:p>
-              <a:pPr algn="ctr"/>
-              <a:endParaRPr lang="en-US"/>
-            </a:p>
-          </p:txBody>
-        </p:sp>
-        <p:sp>
-          <p:nvSpPr>
-            <p:cNvPr id="7" name="Freeform: Shape 6">
-              <a:extLst>
-                <a:ext uri="{FF2B5EF4-FFF2-40B4-BE49-F238E27FC236}">
-                  <a16:creationId xmlns:a16="http://schemas.microsoft.com/office/drawing/2014/main" id="{1F26FC8F-763D-5B45-092F-B76C1D726E15}"/>
-                </a:ext>
-              </a:extLst>
-            </p:cNvPr>
-            <p:cNvSpPr/>
-            <p:nvPr/>
-          </p:nvSpPr>
-          <p:spPr>
-            <a:xfrm>
-              <a:off x="3690257" y="4147457"/>
-              <a:ext cx="609600" cy="218122"/>
-            </a:xfrm>
-            <a:custGeom>
-              <a:avLst/>
-              <a:gdLst>
-                <a:gd name="connsiteX0" fmla="*/ 0 w 609600"/>
-                <a:gd name="connsiteY0" fmla="*/ 0 h 218122"/>
-                <a:gd name="connsiteX1" fmla="*/ 326572 w 609600"/>
-                <a:gd name="connsiteY1" fmla="*/ 217714 h 218122"/>
-                <a:gd name="connsiteX2" fmla="*/ 609600 w 609600"/>
-                <a:gd name="connsiteY2" fmla="*/ 43543 h 218122"/>
-              </a:gdLst>
-              <a:ahLst/>
-              <a:cxnLst>
-                <a:cxn ang="0">
-                  <a:pos x="connsiteX0" y="connsiteY0"/>
-                </a:cxn>
-                <a:cxn ang="0">
-                  <a:pos x="connsiteX1" y="connsiteY1"/>
-                </a:cxn>
-                <a:cxn ang="0">
-                  <a:pos x="connsiteX2" y="connsiteY2"/>
-                </a:cxn>
-              </a:cxnLst>
-              <a:rect l="l" t="t" r="r" b="b"/>
-              <a:pathLst>
-                <a:path w="609600" h="218122">
-                  <a:moveTo>
-                    <a:pt x="0" y="0"/>
-                  </a:moveTo>
-                  <a:cubicBezTo>
-                    <a:pt x="112486" y="105228"/>
-                    <a:pt x="224972" y="210457"/>
-                    <a:pt x="326572" y="217714"/>
-                  </a:cubicBezTo>
-                  <a:cubicBezTo>
-                    <a:pt x="428172" y="224971"/>
-                    <a:pt x="518886" y="134257"/>
-                    <a:pt x="609600" y="43543"/>
-                  </a:cubicBezTo>
-                </a:path>
-              </a:pathLst>
-            </a:custGeom>
-            <a:noFill/>
-            <a:ln w="38100">
-              <a:solidFill>
-                <a:srgbClr val="92D050"/>
-              </a:solidFill>
-            </a:ln>
-          </p:spPr>
-          <p:style>
-            <a:lnRef idx="2">
-              <a:schemeClr val="accent1">
-                <a:shade val="15000"/>
-              </a:schemeClr>
-            </a:lnRef>
-            <a:fillRef idx="1">
-              <a:schemeClr val="accent1"/>
-            </a:fillRef>
-            <a:effectRef idx="0">
-              <a:schemeClr val="accent1"/>
-            </a:effectRef>
-            <a:fontRef idx="minor">
-              <a:schemeClr val="lt1"/>
-            </a:fontRef>
-          </p:style>
-          <p:txBody>
-            <a:bodyPr rtlCol="0" anchor="ctr"/>
-            <a:lstStyle/>
-            <a:p>
-              <a:pPr algn="ctr"/>
-              <a:endParaRPr lang="en-US"/>
-            </a:p>
-          </p:txBody>
-        </p:sp>
-        <p:sp>
-          <p:nvSpPr>
-            <p:cNvPr id="8" name="Freeform: Shape 7">
-              <a:extLst>
-                <a:ext uri="{FF2B5EF4-FFF2-40B4-BE49-F238E27FC236}">
-                  <a16:creationId xmlns:a16="http://schemas.microsoft.com/office/drawing/2014/main" id="{C9E69F27-D965-1E05-0DCE-C095493AE6EB}"/>
-                </a:ext>
-              </a:extLst>
-            </p:cNvPr>
-            <p:cNvSpPr/>
-            <p:nvPr/>
-          </p:nvSpPr>
-          <p:spPr>
-            <a:xfrm>
-              <a:off x="4767943" y="4299857"/>
-              <a:ext cx="881743" cy="275052"/>
-            </a:xfrm>
-            <a:custGeom>
-              <a:avLst/>
-              <a:gdLst>
-                <a:gd name="connsiteX0" fmla="*/ 0 w 881743"/>
-                <a:gd name="connsiteY0" fmla="*/ 0 h 275052"/>
-                <a:gd name="connsiteX1" fmla="*/ 359228 w 881743"/>
-                <a:gd name="connsiteY1" fmla="*/ 272143 h 275052"/>
-                <a:gd name="connsiteX2" fmla="*/ 881743 w 881743"/>
-                <a:gd name="connsiteY2" fmla="*/ 119743 h 275052"/>
-              </a:gdLst>
-              <a:ahLst/>
-              <a:cxnLst>
-                <a:cxn ang="0">
-                  <a:pos x="connsiteX0" y="connsiteY0"/>
-                </a:cxn>
-                <a:cxn ang="0">
-                  <a:pos x="connsiteX1" y="connsiteY1"/>
-                </a:cxn>
-                <a:cxn ang="0">
-                  <a:pos x="connsiteX2" y="connsiteY2"/>
-                </a:cxn>
-              </a:cxnLst>
-              <a:rect l="l" t="t" r="r" b="b"/>
-              <a:pathLst>
-                <a:path w="881743" h="275052">
-                  <a:moveTo>
-                    <a:pt x="0" y="0"/>
-                  </a:moveTo>
-                  <a:cubicBezTo>
-                    <a:pt x="106135" y="126093"/>
-                    <a:pt x="212271" y="252186"/>
-                    <a:pt x="359228" y="272143"/>
-                  </a:cubicBezTo>
-                  <a:cubicBezTo>
-                    <a:pt x="506185" y="292100"/>
-                    <a:pt x="693964" y="205921"/>
-                    <a:pt x="881743" y="119743"/>
-                  </a:cubicBezTo>
-                </a:path>
-              </a:pathLst>
-            </a:custGeom>
-            <a:noFill/>
-            <a:ln w="38100">
-              <a:solidFill>
-                <a:srgbClr val="92D050"/>
-              </a:solidFill>
-            </a:ln>
-          </p:spPr>
-          <p:style>
-            <a:lnRef idx="2">
-              <a:schemeClr val="accent1">
-                <a:shade val="15000"/>
-              </a:schemeClr>
-            </a:lnRef>
-            <a:fillRef idx="1">
-              <a:schemeClr val="accent1"/>
-            </a:fillRef>
-            <a:effectRef idx="0">
-              <a:schemeClr val="accent1"/>
-            </a:effectRef>
-            <a:fontRef idx="minor">
-              <a:schemeClr val="lt1"/>
-            </a:fontRef>
-          </p:style>
-          <p:txBody>
-            <a:bodyPr rtlCol="0" anchor="ctr"/>
-            <a:lstStyle/>
-            <a:p>
-              <a:pPr algn="ctr"/>
-              <a:endParaRPr lang="en-US"/>
-            </a:p>
-          </p:txBody>
-        </p:sp>
-        <p:sp>
-          <p:nvSpPr>
-            <p:cNvPr id="9" name="Freeform: Shape 8">
-              <a:extLst>
-                <a:ext uri="{FF2B5EF4-FFF2-40B4-BE49-F238E27FC236}">
-                  <a16:creationId xmlns:a16="http://schemas.microsoft.com/office/drawing/2014/main" id="{4D5BC562-DD2B-A43C-BDB4-8194AAFEB5B4}"/>
-                </a:ext>
-              </a:extLst>
-            </p:cNvPr>
-            <p:cNvSpPr/>
-            <p:nvPr/>
-          </p:nvSpPr>
-          <p:spPr>
-            <a:xfrm>
-              <a:off x="5878286" y="4212771"/>
-              <a:ext cx="1055914" cy="273981"/>
-            </a:xfrm>
-            <a:custGeom>
-              <a:avLst/>
-              <a:gdLst>
-                <a:gd name="connsiteX0" fmla="*/ 0 w 1055914"/>
-                <a:gd name="connsiteY0" fmla="*/ 97972 h 273981"/>
-                <a:gd name="connsiteX1" fmla="*/ 609600 w 1055914"/>
-                <a:gd name="connsiteY1" fmla="*/ 272143 h 273981"/>
-                <a:gd name="connsiteX2" fmla="*/ 1055914 w 1055914"/>
-                <a:gd name="connsiteY2" fmla="*/ 0 h 273981"/>
-              </a:gdLst>
-              <a:ahLst/>
-              <a:cxnLst>
-                <a:cxn ang="0">
-                  <a:pos x="connsiteX0" y="connsiteY0"/>
-                </a:cxn>
-                <a:cxn ang="0">
-                  <a:pos x="connsiteX1" y="connsiteY1"/>
-                </a:cxn>
-                <a:cxn ang="0">
-                  <a:pos x="connsiteX2" y="connsiteY2"/>
-                </a:cxn>
-              </a:cxnLst>
-              <a:rect l="l" t="t" r="r" b="b"/>
-              <a:pathLst>
-                <a:path w="1055914" h="273981">
-                  <a:moveTo>
-                    <a:pt x="0" y="97972"/>
-                  </a:moveTo>
-                  <a:cubicBezTo>
-                    <a:pt x="216807" y="193222"/>
-                    <a:pt x="433614" y="288472"/>
-                    <a:pt x="609600" y="272143"/>
-                  </a:cubicBezTo>
-                  <a:cubicBezTo>
-                    <a:pt x="785586" y="255814"/>
-                    <a:pt x="920750" y="127907"/>
-                    <a:pt x="1055914" y="0"/>
-                  </a:cubicBezTo>
-                </a:path>
-              </a:pathLst>
-            </a:custGeom>
-            <a:noFill/>
-            <a:ln w="38100">
-              <a:solidFill>
-                <a:srgbClr val="92D050"/>
-              </a:solidFill>
-            </a:ln>
-          </p:spPr>
-          <p:style>
-            <a:lnRef idx="2">
-              <a:schemeClr val="accent1">
-                <a:shade val="15000"/>
-              </a:schemeClr>
-            </a:lnRef>
-            <a:fillRef idx="1">
-              <a:schemeClr val="accent1"/>
-            </a:fillRef>
-            <a:effectRef idx="0">
-              <a:schemeClr val="accent1"/>
-            </a:effectRef>
-            <a:fontRef idx="minor">
-              <a:schemeClr val="lt1"/>
-            </a:fontRef>
-          </p:style>
-          <p:txBody>
-            <a:bodyPr rtlCol="0" anchor="ctr"/>
-            <a:lstStyle/>
-            <a:p>
-              <a:pPr algn="ctr"/>
-              <a:endParaRPr lang="en-US"/>
-            </a:p>
-          </p:txBody>
-        </p:sp>
+          </p:grpSpPr>
+          <p:sp>
+            <p:nvSpPr>
+              <p:cNvPr id="6" name="Freeform: Shape 5">
+                <a:extLst>
+                  <a:ext uri="{FF2B5EF4-FFF2-40B4-BE49-F238E27FC236}">
+                    <a16:creationId xmlns:a16="http://schemas.microsoft.com/office/drawing/2014/main" id="{DADF6E9C-FF60-3E2A-D893-13C5881795E0}"/>
+                  </a:ext>
+                </a:extLst>
+              </p:cNvPr>
+              <p:cNvSpPr/>
+              <p:nvPr/>
+            </p:nvSpPr>
+            <p:spPr>
+              <a:xfrm>
+                <a:off x="3222171" y="1600200"/>
+                <a:ext cx="4626429" cy="664423"/>
+              </a:xfrm>
+              <a:custGeom>
+                <a:avLst/>
+                <a:gdLst>
+                  <a:gd name="connsiteX0" fmla="*/ 0 w 4626429"/>
+                  <a:gd name="connsiteY0" fmla="*/ 446314 h 664423"/>
+                  <a:gd name="connsiteX1" fmla="*/ 326572 w 4626429"/>
+                  <a:gd name="connsiteY1" fmla="*/ 620486 h 664423"/>
+                  <a:gd name="connsiteX2" fmla="*/ 827315 w 4626429"/>
+                  <a:gd name="connsiteY2" fmla="*/ 326571 h 664423"/>
+                  <a:gd name="connsiteX3" fmla="*/ 1143000 w 4626429"/>
+                  <a:gd name="connsiteY3" fmla="*/ 468086 h 664423"/>
+                  <a:gd name="connsiteX4" fmla="*/ 1643743 w 4626429"/>
+                  <a:gd name="connsiteY4" fmla="*/ 370114 h 664423"/>
+                  <a:gd name="connsiteX5" fmla="*/ 1948543 w 4626429"/>
+                  <a:gd name="connsiteY5" fmla="*/ 664029 h 664423"/>
+                  <a:gd name="connsiteX6" fmla="*/ 2656115 w 4626429"/>
+                  <a:gd name="connsiteY6" fmla="*/ 435429 h 664423"/>
+                  <a:gd name="connsiteX7" fmla="*/ 3124200 w 4626429"/>
+                  <a:gd name="connsiteY7" fmla="*/ 533400 h 664423"/>
+                  <a:gd name="connsiteX8" fmla="*/ 3494315 w 4626429"/>
+                  <a:gd name="connsiteY8" fmla="*/ 413657 h 664423"/>
+                  <a:gd name="connsiteX9" fmla="*/ 3799115 w 4626429"/>
+                  <a:gd name="connsiteY9" fmla="*/ 489857 h 664423"/>
+                  <a:gd name="connsiteX10" fmla="*/ 4114800 w 4626429"/>
+                  <a:gd name="connsiteY10" fmla="*/ 489857 h 664423"/>
+                  <a:gd name="connsiteX11" fmla="*/ 4626429 w 4626429"/>
+                  <a:gd name="connsiteY11" fmla="*/ 0 h 664423"/>
+                </a:gdLst>
+                <a:ahLst/>
+                <a:cxnLst>
+                  <a:cxn ang="0">
+                    <a:pos x="connsiteX0" y="connsiteY0"/>
+                  </a:cxn>
+                  <a:cxn ang="0">
+                    <a:pos x="connsiteX1" y="connsiteY1"/>
+                  </a:cxn>
+                  <a:cxn ang="0">
+                    <a:pos x="connsiteX2" y="connsiteY2"/>
+                  </a:cxn>
+                  <a:cxn ang="0">
+                    <a:pos x="connsiteX3" y="connsiteY3"/>
+                  </a:cxn>
+                  <a:cxn ang="0">
+                    <a:pos x="connsiteX4" y="connsiteY4"/>
+                  </a:cxn>
+                  <a:cxn ang="0">
+                    <a:pos x="connsiteX5" y="connsiteY5"/>
+                  </a:cxn>
+                  <a:cxn ang="0">
+                    <a:pos x="connsiteX6" y="connsiteY6"/>
+                  </a:cxn>
+                  <a:cxn ang="0">
+                    <a:pos x="connsiteX7" y="connsiteY7"/>
+                  </a:cxn>
+                  <a:cxn ang="0">
+                    <a:pos x="connsiteX8" y="connsiteY8"/>
+                  </a:cxn>
+                  <a:cxn ang="0">
+                    <a:pos x="connsiteX9" y="connsiteY9"/>
+                  </a:cxn>
+                  <a:cxn ang="0">
+                    <a:pos x="connsiteX10" y="connsiteY10"/>
+                  </a:cxn>
+                  <a:cxn ang="0">
+                    <a:pos x="connsiteX11" y="connsiteY11"/>
+                  </a:cxn>
+                </a:cxnLst>
+                <a:rect l="l" t="t" r="r" b="b"/>
+                <a:pathLst>
+                  <a:path w="4626429" h="664423">
+                    <a:moveTo>
+                      <a:pt x="0" y="446314"/>
+                    </a:moveTo>
+                    <a:cubicBezTo>
+                      <a:pt x="94343" y="543378"/>
+                      <a:pt x="188686" y="640443"/>
+                      <a:pt x="326572" y="620486"/>
+                    </a:cubicBezTo>
+                    <a:cubicBezTo>
+                      <a:pt x="464458" y="600529"/>
+                      <a:pt x="691244" y="351971"/>
+                      <a:pt x="827315" y="326571"/>
+                    </a:cubicBezTo>
+                    <a:cubicBezTo>
+                      <a:pt x="963386" y="301171"/>
+                      <a:pt x="1006929" y="460829"/>
+                      <a:pt x="1143000" y="468086"/>
+                    </a:cubicBezTo>
+                    <a:cubicBezTo>
+                      <a:pt x="1279071" y="475343"/>
+                      <a:pt x="1509486" y="337457"/>
+                      <a:pt x="1643743" y="370114"/>
+                    </a:cubicBezTo>
+                    <a:cubicBezTo>
+                      <a:pt x="1778000" y="402771"/>
+                      <a:pt x="1779815" y="653143"/>
+                      <a:pt x="1948543" y="664029"/>
+                    </a:cubicBezTo>
+                    <a:cubicBezTo>
+                      <a:pt x="2117271" y="674915"/>
+                      <a:pt x="2460172" y="457200"/>
+                      <a:pt x="2656115" y="435429"/>
+                    </a:cubicBezTo>
+                    <a:cubicBezTo>
+                      <a:pt x="2852058" y="413658"/>
+                      <a:pt x="2984500" y="537029"/>
+                      <a:pt x="3124200" y="533400"/>
+                    </a:cubicBezTo>
+                    <a:cubicBezTo>
+                      <a:pt x="3263900" y="529771"/>
+                      <a:pt x="3381829" y="420914"/>
+                      <a:pt x="3494315" y="413657"/>
+                    </a:cubicBezTo>
+                    <a:cubicBezTo>
+                      <a:pt x="3606801" y="406400"/>
+                      <a:pt x="3695701" y="477157"/>
+                      <a:pt x="3799115" y="489857"/>
+                    </a:cubicBezTo>
+                    <a:cubicBezTo>
+                      <a:pt x="3902529" y="502557"/>
+                      <a:pt x="3976914" y="571500"/>
+                      <a:pt x="4114800" y="489857"/>
+                    </a:cubicBezTo>
+                    <a:cubicBezTo>
+                      <a:pt x="4252686" y="408214"/>
+                      <a:pt x="4439557" y="204107"/>
+                      <a:pt x="4626429" y="0"/>
+                    </a:cubicBezTo>
+                  </a:path>
+                </a:pathLst>
+              </a:custGeom>
+              <a:ln w="38100">
+                <a:solidFill>
+                  <a:srgbClr val="92D050"/>
+                </a:solidFill>
+              </a:ln>
+            </p:spPr>
+            <p:style>
+              <a:lnRef idx="3">
+                <a:schemeClr val="accent1"/>
+              </a:lnRef>
+              <a:fillRef idx="0">
+                <a:schemeClr val="accent1"/>
+              </a:fillRef>
+              <a:effectRef idx="2">
+                <a:schemeClr val="accent1"/>
+              </a:effectRef>
+              <a:fontRef idx="minor">
+                <a:schemeClr val="tx1"/>
+              </a:fontRef>
+            </p:style>
+            <p:txBody>
+              <a:bodyPr rtlCol="0" anchor="ctr"/>
+              <a:lstStyle/>
+              <a:p>
+                <a:pPr algn="ctr"/>
+                <a:endParaRPr lang="en-US"/>
+              </a:p>
+            </p:txBody>
+          </p:sp>
+          <p:sp>
+            <p:nvSpPr>
+              <p:cNvPr id="7" name="Freeform: Shape 6">
+                <a:extLst>
+                  <a:ext uri="{FF2B5EF4-FFF2-40B4-BE49-F238E27FC236}">
+                    <a16:creationId xmlns:a16="http://schemas.microsoft.com/office/drawing/2014/main" id="{1F26FC8F-763D-5B45-092F-B76C1D726E15}"/>
+                  </a:ext>
+                </a:extLst>
+              </p:cNvPr>
+              <p:cNvSpPr/>
+              <p:nvPr/>
+            </p:nvSpPr>
+            <p:spPr>
+              <a:xfrm>
+                <a:off x="3690257" y="4147457"/>
+                <a:ext cx="609600" cy="218122"/>
+              </a:xfrm>
+              <a:custGeom>
+                <a:avLst/>
+                <a:gdLst>
+                  <a:gd name="connsiteX0" fmla="*/ 0 w 609600"/>
+                  <a:gd name="connsiteY0" fmla="*/ 0 h 218122"/>
+                  <a:gd name="connsiteX1" fmla="*/ 326572 w 609600"/>
+                  <a:gd name="connsiteY1" fmla="*/ 217714 h 218122"/>
+                  <a:gd name="connsiteX2" fmla="*/ 609600 w 609600"/>
+                  <a:gd name="connsiteY2" fmla="*/ 43543 h 218122"/>
+                </a:gdLst>
+                <a:ahLst/>
+                <a:cxnLst>
+                  <a:cxn ang="0">
+                    <a:pos x="connsiteX0" y="connsiteY0"/>
+                  </a:cxn>
+                  <a:cxn ang="0">
+                    <a:pos x="connsiteX1" y="connsiteY1"/>
+                  </a:cxn>
+                  <a:cxn ang="0">
+                    <a:pos x="connsiteX2" y="connsiteY2"/>
+                  </a:cxn>
+                </a:cxnLst>
+                <a:rect l="l" t="t" r="r" b="b"/>
+                <a:pathLst>
+                  <a:path w="609600" h="218122">
+                    <a:moveTo>
+                      <a:pt x="0" y="0"/>
+                    </a:moveTo>
+                    <a:cubicBezTo>
+                      <a:pt x="112486" y="105228"/>
+                      <a:pt x="224972" y="210457"/>
+                      <a:pt x="326572" y="217714"/>
+                    </a:cubicBezTo>
+                    <a:cubicBezTo>
+                      <a:pt x="428172" y="224971"/>
+                      <a:pt x="518886" y="134257"/>
+                      <a:pt x="609600" y="43543"/>
+                    </a:cubicBezTo>
+                  </a:path>
+                </a:pathLst>
+              </a:custGeom>
+              <a:noFill/>
+              <a:ln w="38100">
+                <a:solidFill>
+                  <a:srgbClr val="92D050"/>
+                </a:solidFill>
+              </a:ln>
+            </p:spPr>
+            <p:style>
+              <a:lnRef idx="2">
+                <a:schemeClr val="accent1">
+                  <a:shade val="15000"/>
+                </a:schemeClr>
+              </a:lnRef>
+              <a:fillRef idx="1">
+                <a:schemeClr val="accent1"/>
+              </a:fillRef>
+              <a:effectRef idx="0">
+                <a:schemeClr val="accent1"/>
+              </a:effectRef>
+              <a:fontRef idx="minor">
+                <a:schemeClr val="lt1"/>
+              </a:fontRef>
+            </p:style>
+            <p:txBody>
+              <a:bodyPr rtlCol="0" anchor="ctr"/>
+              <a:lstStyle/>
+              <a:p>
+                <a:pPr algn="ctr"/>
+                <a:endParaRPr lang="en-US"/>
+              </a:p>
+            </p:txBody>
+          </p:sp>
+          <p:sp>
+            <p:nvSpPr>
+              <p:cNvPr id="8" name="Freeform: Shape 7">
+                <a:extLst>
+                  <a:ext uri="{FF2B5EF4-FFF2-40B4-BE49-F238E27FC236}">
+                    <a16:creationId xmlns:a16="http://schemas.microsoft.com/office/drawing/2014/main" id="{C9E69F27-D965-1E05-0DCE-C095493AE6EB}"/>
+                  </a:ext>
+                </a:extLst>
+              </p:cNvPr>
+              <p:cNvSpPr/>
+              <p:nvPr/>
+            </p:nvSpPr>
+            <p:spPr>
+              <a:xfrm>
+                <a:off x="4767943" y="4299857"/>
+                <a:ext cx="881743" cy="275052"/>
+              </a:xfrm>
+              <a:custGeom>
+                <a:avLst/>
+                <a:gdLst>
+                  <a:gd name="connsiteX0" fmla="*/ 0 w 881743"/>
+                  <a:gd name="connsiteY0" fmla="*/ 0 h 275052"/>
+                  <a:gd name="connsiteX1" fmla="*/ 359228 w 881743"/>
+                  <a:gd name="connsiteY1" fmla="*/ 272143 h 275052"/>
+                  <a:gd name="connsiteX2" fmla="*/ 881743 w 881743"/>
+                  <a:gd name="connsiteY2" fmla="*/ 119743 h 275052"/>
+                </a:gdLst>
+                <a:ahLst/>
+                <a:cxnLst>
+                  <a:cxn ang="0">
+                    <a:pos x="connsiteX0" y="connsiteY0"/>
+                  </a:cxn>
+                  <a:cxn ang="0">
+                    <a:pos x="connsiteX1" y="connsiteY1"/>
+                  </a:cxn>
+                  <a:cxn ang="0">
+                    <a:pos x="connsiteX2" y="connsiteY2"/>
+                  </a:cxn>
+                </a:cxnLst>
+                <a:rect l="l" t="t" r="r" b="b"/>
+                <a:pathLst>
+                  <a:path w="881743" h="275052">
+                    <a:moveTo>
+                      <a:pt x="0" y="0"/>
+                    </a:moveTo>
+                    <a:cubicBezTo>
+                      <a:pt x="106135" y="126093"/>
+                      <a:pt x="212271" y="252186"/>
+                      <a:pt x="359228" y="272143"/>
+                    </a:cubicBezTo>
+                    <a:cubicBezTo>
+                      <a:pt x="506185" y="292100"/>
+                      <a:pt x="693964" y="205921"/>
+                      <a:pt x="881743" y="119743"/>
+                    </a:cubicBezTo>
+                  </a:path>
+                </a:pathLst>
+              </a:custGeom>
+              <a:noFill/>
+              <a:ln w="38100">
+                <a:solidFill>
+                  <a:srgbClr val="92D050"/>
+                </a:solidFill>
+              </a:ln>
+            </p:spPr>
+            <p:style>
+              <a:lnRef idx="2">
+                <a:schemeClr val="accent1">
+                  <a:shade val="15000"/>
+                </a:schemeClr>
+              </a:lnRef>
+              <a:fillRef idx="1">
+                <a:schemeClr val="accent1"/>
+              </a:fillRef>
+              <a:effectRef idx="0">
+                <a:schemeClr val="accent1"/>
+              </a:effectRef>
+              <a:fontRef idx="minor">
+                <a:schemeClr val="lt1"/>
+              </a:fontRef>
+            </p:style>
+            <p:txBody>
+              <a:bodyPr rtlCol="0" anchor="ctr"/>
+              <a:lstStyle/>
+              <a:p>
+                <a:pPr algn="ctr"/>
+                <a:endParaRPr lang="en-US"/>
+              </a:p>
+            </p:txBody>
+          </p:sp>
+          <p:sp>
+            <p:nvSpPr>
+              <p:cNvPr id="9" name="Freeform: Shape 8">
+                <a:extLst>
+                  <a:ext uri="{FF2B5EF4-FFF2-40B4-BE49-F238E27FC236}">
+                    <a16:creationId xmlns:a16="http://schemas.microsoft.com/office/drawing/2014/main" id="{4D5BC562-DD2B-A43C-BDB4-8194AAFEB5B4}"/>
+                  </a:ext>
+                </a:extLst>
+              </p:cNvPr>
+              <p:cNvSpPr/>
+              <p:nvPr/>
+            </p:nvSpPr>
+            <p:spPr>
+              <a:xfrm>
+                <a:off x="5878286" y="4212771"/>
+                <a:ext cx="1055914" cy="273981"/>
+              </a:xfrm>
+              <a:custGeom>
+                <a:avLst/>
+                <a:gdLst>
+                  <a:gd name="connsiteX0" fmla="*/ 0 w 1055914"/>
+                  <a:gd name="connsiteY0" fmla="*/ 97972 h 273981"/>
+                  <a:gd name="connsiteX1" fmla="*/ 609600 w 1055914"/>
+                  <a:gd name="connsiteY1" fmla="*/ 272143 h 273981"/>
+                  <a:gd name="connsiteX2" fmla="*/ 1055914 w 1055914"/>
+                  <a:gd name="connsiteY2" fmla="*/ 0 h 273981"/>
+                </a:gdLst>
+                <a:ahLst/>
+                <a:cxnLst>
+                  <a:cxn ang="0">
+                    <a:pos x="connsiteX0" y="connsiteY0"/>
+                  </a:cxn>
+                  <a:cxn ang="0">
+                    <a:pos x="connsiteX1" y="connsiteY1"/>
+                  </a:cxn>
+                  <a:cxn ang="0">
+                    <a:pos x="connsiteX2" y="connsiteY2"/>
+                  </a:cxn>
+                </a:cxnLst>
+                <a:rect l="l" t="t" r="r" b="b"/>
+                <a:pathLst>
+                  <a:path w="1055914" h="273981">
+                    <a:moveTo>
+                      <a:pt x="0" y="97972"/>
+                    </a:moveTo>
+                    <a:cubicBezTo>
+                      <a:pt x="216807" y="193222"/>
+                      <a:pt x="433614" y="288472"/>
+                      <a:pt x="609600" y="272143"/>
+                    </a:cubicBezTo>
+                    <a:cubicBezTo>
+                      <a:pt x="785586" y="255814"/>
+                      <a:pt x="920750" y="127907"/>
+                      <a:pt x="1055914" y="0"/>
+                    </a:cubicBezTo>
+                  </a:path>
+                </a:pathLst>
+              </a:custGeom>
+              <a:noFill/>
+              <a:ln w="38100">
+                <a:solidFill>
+                  <a:srgbClr val="92D050"/>
+                </a:solidFill>
+              </a:ln>
+            </p:spPr>
+            <p:style>
+              <a:lnRef idx="2">
+                <a:schemeClr val="accent1">
+                  <a:shade val="15000"/>
+                </a:schemeClr>
+              </a:lnRef>
+              <a:fillRef idx="1">
+                <a:schemeClr val="accent1"/>
+              </a:fillRef>
+              <a:effectRef idx="0">
+                <a:schemeClr val="accent1"/>
+              </a:effectRef>
+              <a:fontRef idx="minor">
+                <a:schemeClr val="lt1"/>
+              </a:fontRef>
+            </p:style>
+            <p:txBody>
+              <a:bodyPr rtlCol="0" anchor="ctr"/>
+              <a:lstStyle/>
+              <a:p>
+                <a:pPr algn="ctr"/>
+                <a:endParaRPr lang="en-US"/>
+              </a:p>
+            </p:txBody>
+          </p:sp>
+        </p:grpSp>
       </p:grpSp>
     </p:spTree>
     <p:extLst>

--- a/paper-mstid-rt/pub_figures/TID.pptx
+++ b/paper-mstid-rt/pub_figures/TID.pptx
@@ -273,7 +273,7 @@
           <a:p>
             <a:fld id="{A9382490-085F-45B0-B756-BD60DC77582D}" type="datetimeFigureOut">
               <a:rPr lang="en-US" smtClean="0"/>
-              <a:t>5/14/2025</a:t>
+              <a:t>6/5/2025</a:t>
             </a:fld>
             <a:endParaRPr lang="en-US"/>
           </a:p>
@@ -471,7 +471,7 @@
           <a:p>
             <a:fld id="{A9382490-085F-45B0-B756-BD60DC77582D}" type="datetimeFigureOut">
               <a:rPr lang="en-US" smtClean="0"/>
-              <a:t>5/14/2025</a:t>
+              <a:t>6/5/2025</a:t>
             </a:fld>
             <a:endParaRPr lang="en-US"/>
           </a:p>
@@ -679,7 +679,7 @@
           <a:p>
             <a:fld id="{A9382490-085F-45B0-B756-BD60DC77582D}" type="datetimeFigureOut">
               <a:rPr lang="en-US" smtClean="0"/>
-              <a:t>5/14/2025</a:t>
+              <a:t>6/5/2025</a:t>
             </a:fld>
             <a:endParaRPr lang="en-US"/>
           </a:p>
@@ -877,7 +877,7 @@
           <a:p>
             <a:fld id="{A9382490-085F-45B0-B756-BD60DC77582D}" type="datetimeFigureOut">
               <a:rPr lang="en-US" smtClean="0"/>
-              <a:t>5/14/2025</a:t>
+              <a:t>6/5/2025</a:t>
             </a:fld>
             <a:endParaRPr lang="en-US"/>
           </a:p>
@@ -1152,7 +1152,7 @@
           <a:p>
             <a:fld id="{A9382490-085F-45B0-B756-BD60DC77582D}" type="datetimeFigureOut">
               <a:rPr lang="en-US" smtClean="0"/>
-              <a:t>5/14/2025</a:t>
+              <a:t>6/5/2025</a:t>
             </a:fld>
             <a:endParaRPr lang="en-US"/>
           </a:p>
@@ -1417,7 +1417,7 @@
           <a:p>
             <a:fld id="{A9382490-085F-45B0-B756-BD60DC77582D}" type="datetimeFigureOut">
               <a:rPr lang="en-US" smtClean="0"/>
-              <a:t>5/14/2025</a:t>
+              <a:t>6/5/2025</a:t>
             </a:fld>
             <a:endParaRPr lang="en-US"/>
           </a:p>
@@ -1829,7 +1829,7 @@
           <a:p>
             <a:fld id="{A9382490-085F-45B0-B756-BD60DC77582D}" type="datetimeFigureOut">
               <a:rPr lang="en-US" smtClean="0"/>
-              <a:t>5/14/2025</a:t>
+              <a:t>6/5/2025</a:t>
             </a:fld>
             <a:endParaRPr lang="en-US"/>
           </a:p>
@@ -1970,7 +1970,7 @@
           <a:p>
             <a:fld id="{A9382490-085F-45B0-B756-BD60DC77582D}" type="datetimeFigureOut">
               <a:rPr lang="en-US" smtClean="0"/>
-              <a:t>5/14/2025</a:t>
+              <a:t>6/5/2025</a:t>
             </a:fld>
             <a:endParaRPr lang="en-US"/>
           </a:p>
@@ -2083,7 +2083,7 @@
           <a:p>
             <a:fld id="{A9382490-085F-45B0-B756-BD60DC77582D}" type="datetimeFigureOut">
               <a:rPr lang="en-US" smtClean="0"/>
-              <a:t>5/14/2025</a:t>
+              <a:t>6/5/2025</a:t>
             </a:fld>
             <a:endParaRPr lang="en-US"/>
           </a:p>
@@ -2394,7 +2394,7 @@
           <a:p>
             <a:fld id="{A9382490-085F-45B0-B756-BD60DC77582D}" type="datetimeFigureOut">
               <a:rPr lang="en-US" smtClean="0"/>
-              <a:t>5/14/2025</a:t>
+              <a:t>6/5/2025</a:t>
             </a:fld>
             <a:endParaRPr lang="en-US"/>
           </a:p>
@@ -2682,7 +2682,7 @@
           <a:p>
             <a:fld id="{A9382490-085F-45B0-B756-BD60DC77582D}" type="datetimeFigureOut">
               <a:rPr lang="en-US" smtClean="0"/>
-              <a:t>5/14/2025</a:t>
+              <a:t>6/5/2025</a:t>
             </a:fld>
             <a:endParaRPr lang="en-US"/>
           </a:p>
@@ -2923,7 +2923,7 @@
           <a:p>
             <a:fld id="{A9382490-085F-45B0-B756-BD60DC77582D}" type="datetimeFigureOut">
               <a:rPr lang="en-US" smtClean="0"/>
-              <a:t>5/14/2025</a:t>
+              <a:t>6/5/2025</a:t>
             </a:fld>
             <a:endParaRPr lang="en-US"/>
           </a:p>
@@ -8707,10 +8707,10 @@
       </p:grpSpPr>
       <p:grpSp>
         <p:nvGrpSpPr>
-          <p:cNvPr id="4" name="Group 3">
+          <p:cNvPr id="11" name="Group 10">
             <a:extLst>
               <a:ext uri="{FF2B5EF4-FFF2-40B4-BE49-F238E27FC236}">
-                <a16:creationId xmlns:a16="http://schemas.microsoft.com/office/drawing/2014/main" id="{D094CE38-8A8B-83FD-046C-E88389DF307C}"/>
+                <a16:creationId xmlns:a16="http://schemas.microsoft.com/office/drawing/2014/main" id="{6C621AA0-5879-0B1D-D545-54F2CBBACF4A}"/>
               </a:ext>
             </a:extLst>
           </p:cNvPr>
@@ -8727,10 +8727,10 @@
         </p:grpSpPr>
         <p:pic>
           <p:nvPicPr>
-            <p:cNvPr id="3" name="Picture 2" descr="A screenshot of a graph&#10;&#10;AI-generated content may be incorrect.">
+            <p:cNvPr id="5" name="Picture 4" descr="A screenshot of a graph&#10;&#10;AI-generated content may be incorrect.">
               <a:extLst>
                 <a:ext uri="{FF2B5EF4-FFF2-40B4-BE49-F238E27FC236}">
-                  <a16:creationId xmlns:a16="http://schemas.microsoft.com/office/drawing/2014/main" id="{970826CE-2322-7881-C651-184A1529D5C2}"/>
+                  <a16:creationId xmlns:a16="http://schemas.microsoft.com/office/drawing/2014/main" id="{55A09995-CF9B-76CC-49AE-8F6DE3112E83}"/>
                 </a:ext>
               </a:extLst>
             </p:cNvPr>

--- a/paper-mstid-rt/pub_figures/TID.pptx
+++ b/paper-mstid-rt/pub_figures/TID.pptx
@@ -273,7 +273,7 @@
           <a:p>
             <a:fld id="{A9382490-085F-45B0-B756-BD60DC77582D}" type="datetimeFigureOut">
               <a:rPr lang="en-US" smtClean="0"/>
-              <a:t>6/5/2025</a:t>
+              <a:t>8/12/2025</a:t>
             </a:fld>
             <a:endParaRPr lang="en-US"/>
           </a:p>
@@ -471,7 +471,7 @@
           <a:p>
             <a:fld id="{A9382490-085F-45B0-B756-BD60DC77582D}" type="datetimeFigureOut">
               <a:rPr lang="en-US" smtClean="0"/>
-              <a:t>6/5/2025</a:t>
+              <a:t>8/12/2025</a:t>
             </a:fld>
             <a:endParaRPr lang="en-US"/>
           </a:p>
@@ -679,7 +679,7 @@
           <a:p>
             <a:fld id="{A9382490-085F-45B0-B756-BD60DC77582D}" type="datetimeFigureOut">
               <a:rPr lang="en-US" smtClean="0"/>
-              <a:t>6/5/2025</a:t>
+              <a:t>8/12/2025</a:t>
             </a:fld>
             <a:endParaRPr lang="en-US"/>
           </a:p>
@@ -877,7 +877,7 @@
           <a:p>
             <a:fld id="{A9382490-085F-45B0-B756-BD60DC77582D}" type="datetimeFigureOut">
               <a:rPr lang="en-US" smtClean="0"/>
-              <a:t>6/5/2025</a:t>
+              <a:t>8/12/2025</a:t>
             </a:fld>
             <a:endParaRPr lang="en-US"/>
           </a:p>
@@ -1152,7 +1152,7 @@
           <a:p>
             <a:fld id="{A9382490-085F-45B0-B756-BD60DC77582D}" type="datetimeFigureOut">
               <a:rPr lang="en-US" smtClean="0"/>
-              <a:t>6/5/2025</a:t>
+              <a:t>8/12/2025</a:t>
             </a:fld>
             <a:endParaRPr lang="en-US"/>
           </a:p>
@@ -1417,7 +1417,7 @@
           <a:p>
             <a:fld id="{A9382490-085F-45B0-B756-BD60DC77582D}" type="datetimeFigureOut">
               <a:rPr lang="en-US" smtClean="0"/>
-              <a:t>6/5/2025</a:t>
+              <a:t>8/12/2025</a:t>
             </a:fld>
             <a:endParaRPr lang="en-US"/>
           </a:p>
@@ -1829,7 +1829,7 @@
           <a:p>
             <a:fld id="{A9382490-085F-45B0-B756-BD60DC77582D}" type="datetimeFigureOut">
               <a:rPr lang="en-US" smtClean="0"/>
-              <a:t>6/5/2025</a:t>
+              <a:t>8/12/2025</a:t>
             </a:fld>
             <a:endParaRPr lang="en-US"/>
           </a:p>
@@ -1970,7 +1970,7 @@
           <a:p>
             <a:fld id="{A9382490-085F-45B0-B756-BD60DC77582D}" type="datetimeFigureOut">
               <a:rPr lang="en-US" smtClean="0"/>
-              <a:t>6/5/2025</a:t>
+              <a:t>8/12/2025</a:t>
             </a:fld>
             <a:endParaRPr lang="en-US"/>
           </a:p>
@@ -2083,7 +2083,7 @@
           <a:p>
             <a:fld id="{A9382490-085F-45B0-B756-BD60DC77582D}" type="datetimeFigureOut">
               <a:rPr lang="en-US" smtClean="0"/>
-              <a:t>6/5/2025</a:t>
+              <a:t>8/12/2025</a:t>
             </a:fld>
             <a:endParaRPr lang="en-US"/>
           </a:p>
@@ -2394,7 +2394,7 @@
           <a:p>
             <a:fld id="{A9382490-085F-45B0-B756-BD60DC77582D}" type="datetimeFigureOut">
               <a:rPr lang="en-US" smtClean="0"/>
-              <a:t>6/5/2025</a:t>
+              <a:t>8/12/2025</a:t>
             </a:fld>
             <a:endParaRPr lang="en-US"/>
           </a:p>
@@ -2682,7 +2682,7 @@
           <a:p>
             <a:fld id="{A9382490-085F-45B0-B756-BD60DC77582D}" type="datetimeFigureOut">
               <a:rPr lang="en-US" smtClean="0"/>
-              <a:t>6/5/2025</a:t>
+              <a:t>8/12/2025</a:t>
             </a:fld>
             <a:endParaRPr lang="en-US"/>
           </a:p>
@@ -2923,7 +2923,7 @@
           <a:p>
             <a:fld id="{A9382490-085F-45B0-B756-BD60DC77582D}" type="datetimeFigureOut">
               <a:rPr lang="en-US" smtClean="0"/>
-              <a:t>6/5/2025</a:t>
+              <a:t>8/12/2025</a:t>
             </a:fld>
             <a:endParaRPr lang="en-US"/>
           </a:p>
@@ -8590,8 +8590,8 @@
           </p:nvSpPr>
           <p:spPr>
             <a:xfrm>
-              <a:off x="7720613" y="3668423"/>
-              <a:ext cx="1079398" cy="646331"/>
+              <a:off x="7850830" y="3668423"/>
+              <a:ext cx="1079398" cy="532439"/>
             </a:xfrm>
             <a:prstGeom prst="rect">
               <a:avLst/>
@@ -8620,7 +8620,23 @@
                     <a:srgbClr val="FF0000"/>
                   </a:solidFill>
                 </a:rPr>
-                <a:t>E Scatter</a:t>
+                <a:t>E</a:t>
+              </a:r>
+              <a:r>
+                <a:rPr lang="en-US" baseline="-25000" dirty="0">
+                  <a:solidFill>
+                    <a:srgbClr val="FF0000"/>
+                  </a:solidFill>
+                </a:rPr>
+                <a:t>s</a:t>
+              </a:r>
+              <a:r>
+                <a:rPr lang="en-US" dirty="0">
+                  <a:solidFill>
+                    <a:srgbClr val="FF0000"/>
+                  </a:solidFill>
+                </a:rPr>
+                <a:t> Scatter</a:t>
               </a:r>
             </a:p>
           </p:txBody>

--- a/paper-mstid-rt/pub_figures/TID.pptx
+++ b/paper-mstid-rt/pub_figures/TID.pptx
@@ -8590,8 +8590,8 @@
           </p:nvSpPr>
           <p:spPr>
             <a:xfrm>
-              <a:off x="7850830" y="3668423"/>
-              <a:ext cx="1079398" cy="532439"/>
+              <a:off x="7852005" y="3765107"/>
+              <a:ext cx="1079398" cy="760627"/>
             </a:xfrm>
             <a:prstGeom prst="rect">
               <a:avLst/>
@@ -8610,17 +8610,7 @@
                     <a:srgbClr val="FF0000"/>
                   </a:solidFill>
                 </a:rPr>
-                <a:t>1-hop </a:t>
-              </a:r>
-            </a:p>
-            <a:p>
-              <a:r>
-                <a:rPr lang="en-US" dirty="0">
-                  <a:solidFill>
-                    <a:srgbClr val="FF0000"/>
-                  </a:solidFill>
-                </a:rPr>
-                <a:t>E</a:t>
+                <a:t>1-hop E</a:t>
               </a:r>
               <a:r>
                 <a:rPr lang="en-US" baseline="-25000" dirty="0">
@@ -8636,7 +8626,17 @@
                     <a:srgbClr val="FF0000"/>
                   </a:solidFill>
                 </a:rPr>
-                <a:t> Scatter</a:t>
+                <a:t> </a:t>
+              </a:r>
+            </a:p>
+            <a:p>
+              <a:r>
+                <a:rPr lang="en-US" dirty="0">
+                  <a:solidFill>
+                    <a:srgbClr val="FF0000"/>
+                  </a:solidFill>
+                </a:rPr>
+                <a:t>Ground Scatter</a:t>
               </a:r>
             </a:p>
           </p:txBody>
@@ -8656,7 +8656,7 @@
           <p:spPr>
             <a:xfrm>
               <a:off x="10018524" y="2596447"/>
-              <a:ext cx="1072986" cy="646331"/>
+              <a:ext cx="1072986" cy="760627"/>
             </a:xfrm>
             <a:prstGeom prst="rect">
               <a:avLst/>
@@ -8675,17 +8675,7 @@
                     <a:srgbClr val="FF0000"/>
                   </a:solidFill>
                 </a:rPr>
-                <a:t>1-hop </a:t>
-              </a:r>
-            </a:p>
-            <a:p>
-              <a:r>
-                <a:rPr lang="en-US" dirty="0">
-                  <a:solidFill>
-                    <a:srgbClr val="FF0000"/>
-                  </a:solidFill>
-                </a:rPr>
-                <a:t>F Scatter</a:t>
+                <a:t>1-hop F Ground Scatter</a:t>
               </a:r>
             </a:p>
           </p:txBody>

--- a/paper-mstid-rt/pub_figures/TID.pptx
+++ b/paper-mstid-rt/pub_figures/TID.pptx
@@ -8,7 +8,8 @@
     <p:sldId id="256" r:id="rId2"/>
     <p:sldId id="257" r:id="rId3"/>
     <p:sldId id="258" r:id="rId4"/>
-    <p:sldId id="259" r:id="rId5"/>
+    <p:sldId id="260" r:id="rId5"/>
+    <p:sldId id="259" r:id="rId6"/>
   </p:sldIdLst>
   <p:sldSz cx="12192000" cy="6858000"/>
   <p:notesSz cx="6858000" cy="9144000"/>
@@ -273,7 +274,7 @@
           <a:p>
             <a:fld id="{A9382490-085F-45B0-B756-BD60DC77582D}" type="datetimeFigureOut">
               <a:rPr lang="en-US" smtClean="0"/>
-              <a:t>8/12/2025</a:t>
+              <a:t>9/2/2025</a:t>
             </a:fld>
             <a:endParaRPr lang="en-US"/>
           </a:p>
@@ -471,7 +472,7 @@
           <a:p>
             <a:fld id="{A9382490-085F-45B0-B756-BD60DC77582D}" type="datetimeFigureOut">
               <a:rPr lang="en-US" smtClean="0"/>
-              <a:t>8/12/2025</a:t>
+              <a:t>9/2/2025</a:t>
             </a:fld>
             <a:endParaRPr lang="en-US"/>
           </a:p>
@@ -679,7 +680,7 @@
           <a:p>
             <a:fld id="{A9382490-085F-45B0-B756-BD60DC77582D}" type="datetimeFigureOut">
               <a:rPr lang="en-US" smtClean="0"/>
-              <a:t>8/12/2025</a:t>
+              <a:t>9/2/2025</a:t>
             </a:fld>
             <a:endParaRPr lang="en-US"/>
           </a:p>
@@ -877,7 +878,7 @@
           <a:p>
             <a:fld id="{A9382490-085F-45B0-B756-BD60DC77582D}" type="datetimeFigureOut">
               <a:rPr lang="en-US" smtClean="0"/>
-              <a:t>8/12/2025</a:t>
+              <a:t>9/2/2025</a:t>
             </a:fld>
             <a:endParaRPr lang="en-US"/>
           </a:p>
@@ -1152,7 +1153,7 @@
           <a:p>
             <a:fld id="{A9382490-085F-45B0-B756-BD60DC77582D}" type="datetimeFigureOut">
               <a:rPr lang="en-US" smtClean="0"/>
-              <a:t>8/12/2025</a:t>
+              <a:t>9/2/2025</a:t>
             </a:fld>
             <a:endParaRPr lang="en-US"/>
           </a:p>
@@ -1417,7 +1418,7 @@
           <a:p>
             <a:fld id="{A9382490-085F-45B0-B756-BD60DC77582D}" type="datetimeFigureOut">
               <a:rPr lang="en-US" smtClean="0"/>
-              <a:t>8/12/2025</a:t>
+              <a:t>9/2/2025</a:t>
             </a:fld>
             <a:endParaRPr lang="en-US"/>
           </a:p>
@@ -1829,7 +1830,7 @@
           <a:p>
             <a:fld id="{A9382490-085F-45B0-B756-BD60DC77582D}" type="datetimeFigureOut">
               <a:rPr lang="en-US" smtClean="0"/>
-              <a:t>8/12/2025</a:t>
+              <a:t>9/2/2025</a:t>
             </a:fld>
             <a:endParaRPr lang="en-US"/>
           </a:p>
@@ -1970,7 +1971,7 @@
           <a:p>
             <a:fld id="{A9382490-085F-45B0-B756-BD60DC77582D}" type="datetimeFigureOut">
               <a:rPr lang="en-US" smtClean="0"/>
-              <a:t>8/12/2025</a:t>
+              <a:t>9/2/2025</a:t>
             </a:fld>
             <a:endParaRPr lang="en-US"/>
           </a:p>
@@ -2083,7 +2084,7 @@
           <a:p>
             <a:fld id="{A9382490-085F-45B0-B756-BD60DC77582D}" type="datetimeFigureOut">
               <a:rPr lang="en-US" smtClean="0"/>
-              <a:t>8/12/2025</a:t>
+              <a:t>9/2/2025</a:t>
             </a:fld>
             <a:endParaRPr lang="en-US"/>
           </a:p>
@@ -2394,7 +2395,7 @@
           <a:p>
             <a:fld id="{A9382490-085F-45B0-B756-BD60DC77582D}" type="datetimeFigureOut">
               <a:rPr lang="en-US" smtClean="0"/>
-              <a:t>8/12/2025</a:t>
+              <a:t>9/2/2025</a:t>
             </a:fld>
             <a:endParaRPr lang="en-US"/>
           </a:p>
@@ -2682,7 +2683,7 @@
           <a:p>
             <a:fld id="{A9382490-085F-45B0-B756-BD60DC77582D}" type="datetimeFigureOut">
               <a:rPr lang="en-US" smtClean="0"/>
-              <a:t>8/12/2025</a:t>
+              <a:t>9/2/2025</a:t>
             </a:fld>
             <a:endParaRPr lang="en-US"/>
           </a:p>
@@ -2923,7 +2924,7 @@
           <a:p>
             <a:fld id="{A9382490-085F-45B0-B756-BD60DC77582D}" type="datetimeFigureOut">
               <a:rPr lang="en-US" smtClean="0"/>
-              <a:t>8/12/2025</a:t>
+              <a:t>9/2/2025</a:t>
             </a:fld>
             <a:endParaRPr lang="en-US"/>
           </a:p>
@@ -8699,6 +8700,1969 @@
   <p:cSld>
     <p:spTree>
       <p:nvGrpSpPr>
+        <p:cNvPr id="1" name="">
+          <a:extLst>
+            <a:ext uri="{FF2B5EF4-FFF2-40B4-BE49-F238E27FC236}">
+              <a16:creationId xmlns:a16="http://schemas.microsoft.com/office/drawing/2014/main" id="{6479D296-5108-3909-1ADE-C7A10166124D}"/>
+            </a:ext>
+          </a:extLst>
+        </p:cNvPr>
+        <p:cNvGrpSpPr/>
+        <p:nvPr/>
+      </p:nvGrpSpPr>
+      <p:grpSpPr>
+        <a:xfrm>
+          <a:off x="0" y="0"/>
+          <a:ext cx="0" cy="0"/>
+          <a:chOff x="0" y="0"/>
+          <a:chExt cx="0" cy="0"/>
+        </a:xfrm>
+      </p:grpSpPr>
+      <p:grpSp>
+        <p:nvGrpSpPr>
+          <p:cNvPr id="10" name="Group 9">
+            <a:extLst>
+              <a:ext uri="{FF2B5EF4-FFF2-40B4-BE49-F238E27FC236}">
+                <a16:creationId xmlns:a16="http://schemas.microsoft.com/office/drawing/2014/main" id="{66AA154B-D566-8895-B5F4-2F4F70CF446D}"/>
+              </a:ext>
+            </a:extLst>
+          </p:cNvPr>
+          <p:cNvGrpSpPr/>
+          <p:nvPr/>
+        </p:nvGrpSpPr>
+        <p:grpSpPr>
+          <a:xfrm>
+            <a:off x="2192838" y="1136844"/>
+            <a:ext cx="8127912" cy="4069419"/>
+            <a:chOff x="2192838" y="1136844"/>
+            <a:chExt cx="8127912" cy="4069419"/>
+          </a:xfrm>
+        </p:grpSpPr>
+        <p:grpSp>
+          <p:nvGrpSpPr>
+            <p:cNvPr id="49" name="Group 48">
+              <a:extLst>
+                <a:ext uri="{FF2B5EF4-FFF2-40B4-BE49-F238E27FC236}">
+                  <a16:creationId xmlns:a16="http://schemas.microsoft.com/office/drawing/2014/main" id="{A854BBD3-653C-F65B-577B-F7E72C7F5709}"/>
+                </a:ext>
+              </a:extLst>
+            </p:cNvPr>
+            <p:cNvGrpSpPr/>
+            <p:nvPr/>
+          </p:nvGrpSpPr>
+          <p:grpSpPr>
+            <a:xfrm>
+              <a:off x="2811176" y="4139729"/>
+              <a:ext cx="445921" cy="739998"/>
+              <a:chOff x="1346200" y="3181350"/>
+              <a:chExt cx="762000" cy="1320800"/>
+            </a:xfrm>
+          </p:grpSpPr>
+          <p:sp>
+            <p:nvSpPr>
+              <p:cNvPr id="25" name="Oval 24">
+                <a:extLst>
+                  <a:ext uri="{FF2B5EF4-FFF2-40B4-BE49-F238E27FC236}">
+                    <a16:creationId xmlns:a16="http://schemas.microsoft.com/office/drawing/2014/main" id="{14AB31F9-8162-D0CA-A63A-D4A0BF1AEB37}"/>
+                  </a:ext>
+                </a:extLst>
+              </p:cNvPr>
+              <p:cNvSpPr/>
+              <p:nvPr/>
+            </p:nvSpPr>
+            <p:spPr>
+              <a:xfrm rot="20207503">
+                <a:off x="1847850" y="3181350"/>
+                <a:ext cx="260350" cy="692150"/>
+              </a:xfrm>
+              <a:prstGeom prst="ellipse">
+                <a:avLst/>
+              </a:prstGeom>
+              <a:gradFill flip="none" rotWithShape="1">
+                <a:gsLst>
+                  <a:gs pos="0">
+                    <a:schemeClr val="bg1">
+                      <a:lumMod val="65000"/>
+                      <a:tint val="66000"/>
+                      <a:satMod val="160000"/>
+                    </a:schemeClr>
+                  </a:gs>
+                  <a:gs pos="50000">
+                    <a:schemeClr val="bg1">
+                      <a:lumMod val="65000"/>
+                      <a:tint val="44500"/>
+                      <a:satMod val="160000"/>
+                    </a:schemeClr>
+                  </a:gs>
+                  <a:gs pos="100000">
+                    <a:schemeClr val="bg1">
+                      <a:lumMod val="65000"/>
+                      <a:tint val="23500"/>
+                      <a:satMod val="160000"/>
+                    </a:schemeClr>
+                  </a:gs>
+                </a:gsLst>
+                <a:lin ang="0" scaled="1"/>
+                <a:tileRect/>
+              </a:gradFill>
+              <a:ln>
+                <a:solidFill>
+                  <a:schemeClr val="bg1"/>
+                </a:solidFill>
+              </a:ln>
+            </p:spPr>
+            <p:style>
+              <a:lnRef idx="2">
+                <a:schemeClr val="accent1">
+                  <a:shade val="15000"/>
+                </a:schemeClr>
+              </a:lnRef>
+              <a:fillRef idx="1">
+                <a:schemeClr val="accent1"/>
+              </a:fillRef>
+              <a:effectRef idx="0">
+                <a:schemeClr val="accent1"/>
+              </a:effectRef>
+              <a:fontRef idx="minor">
+                <a:schemeClr val="lt1"/>
+              </a:fontRef>
+            </p:style>
+            <p:txBody>
+              <a:bodyPr rtlCol="0" anchor="ctr"/>
+              <a:lstStyle/>
+              <a:p>
+                <a:pPr algn="ctr"/>
+                <a:endParaRPr lang="en-US"/>
+              </a:p>
+            </p:txBody>
+          </p:sp>
+          <p:sp>
+            <p:nvSpPr>
+              <p:cNvPr id="27" name="Freeform: Shape 26">
+                <a:extLst>
+                  <a:ext uri="{FF2B5EF4-FFF2-40B4-BE49-F238E27FC236}">
+                    <a16:creationId xmlns:a16="http://schemas.microsoft.com/office/drawing/2014/main" id="{A80E9E86-43F1-D753-04E2-07EDD8CB2BA8}"/>
+                  </a:ext>
+                </a:extLst>
+              </p:cNvPr>
+              <p:cNvSpPr/>
+              <p:nvPr/>
+            </p:nvSpPr>
+            <p:spPr>
+              <a:xfrm>
+                <a:off x="1683194" y="3238499"/>
+                <a:ext cx="425006" cy="584201"/>
+              </a:xfrm>
+              <a:custGeom>
+                <a:avLst/>
+                <a:gdLst>
+                  <a:gd name="connsiteX0" fmla="*/ 145606 w 418656"/>
+                  <a:gd name="connsiteY0" fmla="*/ 0 h 636149"/>
+                  <a:gd name="connsiteX1" fmla="*/ 12256 w 418656"/>
+                  <a:gd name="connsiteY1" fmla="*/ 488950 h 636149"/>
+                  <a:gd name="connsiteX2" fmla="*/ 418656 w 418656"/>
+                  <a:gd name="connsiteY2" fmla="*/ 635000 h 636149"/>
+                </a:gdLst>
+                <a:ahLst/>
+                <a:cxnLst>
+                  <a:cxn ang="0">
+                    <a:pos x="connsiteX0" y="connsiteY0"/>
+                  </a:cxn>
+                  <a:cxn ang="0">
+                    <a:pos x="connsiteX1" y="connsiteY1"/>
+                  </a:cxn>
+                  <a:cxn ang="0">
+                    <a:pos x="connsiteX2" y="connsiteY2"/>
+                  </a:cxn>
+                </a:cxnLst>
+                <a:rect l="l" t="t" r="r" b="b"/>
+                <a:pathLst>
+                  <a:path w="418656" h="636149">
+                    <a:moveTo>
+                      <a:pt x="145606" y="0"/>
+                    </a:moveTo>
+                    <a:cubicBezTo>
+                      <a:pt x="56177" y="191558"/>
+                      <a:pt x="-33252" y="383117"/>
+                      <a:pt x="12256" y="488950"/>
+                    </a:cubicBezTo>
+                    <a:cubicBezTo>
+                      <a:pt x="57764" y="594783"/>
+                      <a:pt x="306473" y="644525"/>
+                      <a:pt x="418656" y="635000"/>
+                    </a:cubicBezTo>
+                  </a:path>
+                </a:pathLst>
+              </a:custGeom>
+            </p:spPr>
+            <p:style>
+              <a:lnRef idx="1">
+                <a:schemeClr val="dk1"/>
+              </a:lnRef>
+              <a:fillRef idx="0">
+                <a:schemeClr val="dk1"/>
+              </a:fillRef>
+              <a:effectRef idx="0">
+                <a:schemeClr val="dk1"/>
+              </a:effectRef>
+              <a:fontRef idx="minor">
+                <a:schemeClr val="tx1"/>
+              </a:fontRef>
+            </p:style>
+            <p:txBody>
+              <a:bodyPr rtlCol="0" anchor="ctr"/>
+              <a:lstStyle/>
+              <a:p>
+                <a:pPr algn="ctr"/>
+                <a:endParaRPr lang="en-US"/>
+              </a:p>
+            </p:txBody>
+          </p:sp>
+          <p:cxnSp>
+            <p:nvCxnSpPr>
+              <p:cNvPr id="29" name="Straight Connector 28">
+                <a:extLst>
+                  <a:ext uri="{FF2B5EF4-FFF2-40B4-BE49-F238E27FC236}">
+                    <a16:creationId xmlns:a16="http://schemas.microsoft.com/office/drawing/2014/main" id="{CB90678C-8F2C-FC52-A438-7A3D9393074F}"/>
+                  </a:ext>
+                </a:extLst>
+              </p:cNvPr>
+              <p:cNvCxnSpPr>
+                <a:cxnSpLocks/>
+                <a:stCxn id="27" idx="1"/>
+              </p:cNvCxnSpPr>
+              <p:nvPr/>
+            </p:nvCxnSpPr>
+            <p:spPr>
+              <a:xfrm flipH="1">
+                <a:off x="1346200" y="3687521"/>
+                <a:ext cx="349436" cy="713029"/>
+              </a:xfrm>
+              <a:prstGeom prst="line">
+                <a:avLst/>
+              </a:prstGeom>
+            </p:spPr>
+            <p:style>
+              <a:lnRef idx="2">
+                <a:schemeClr val="dk1"/>
+              </a:lnRef>
+              <a:fillRef idx="0">
+                <a:schemeClr val="dk1"/>
+              </a:fillRef>
+              <a:effectRef idx="1">
+                <a:schemeClr val="dk1"/>
+              </a:effectRef>
+              <a:fontRef idx="minor">
+                <a:schemeClr val="tx1"/>
+              </a:fontRef>
+            </p:style>
+          </p:cxnSp>
+          <p:cxnSp>
+            <p:nvCxnSpPr>
+              <p:cNvPr id="30" name="Straight Connector 29">
+                <a:extLst>
+                  <a:ext uri="{FF2B5EF4-FFF2-40B4-BE49-F238E27FC236}">
+                    <a16:creationId xmlns:a16="http://schemas.microsoft.com/office/drawing/2014/main" id="{4B0C8D49-9B78-678F-C456-D7876CFB69CB}"/>
+                  </a:ext>
+                </a:extLst>
+              </p:cNvPr>
+              <p:cNvCxnSpPr>
+                <a:cxnSpLocks/>
+                <a:stCxn id="27" idx="1"/>
+              </p:cNvCxnSpPr>
+              <p:nvPr/>
+            </p:nvCxnSpPr>
+            <p:spPr>
+              <a:xfrm flipH="1">
+                <a:off x="1683194" y="3687521"/>
+                <a:ext cx="12442" cy="814629"/>
+              </a:xfrm>
+              <a:prstGeom prst="line">
+                <a:avLst/>
+              </a:prstGeom>
+            </p:spPr>
+            <p:style>
+              <a:lnRef idx="2">
+                <a:schemeClr val="dk1"/>
+              </a:lnRef>
+              <a:fillRef idx="0">
+                <a:schemeClr val="dk1"/>
+              </a:fillRef>
+              <a:effectRef idx="1">
+                <a:schemeClr val="dk1"/>
+              </a:effectRef>
+              <a:fontRef idx="minor">
+                <a:schemeClr val="tx1"/>
+              </a:fontRef>
+            </p:style>
+          </p:cxnSp>
+          <p:cxnSp>
+            <p:nvCxnSpPr>
+              <p:cNvPr id="33" name="Straight Connector 32">
+                <a:extLst>
+                  <a:ext uri="{FF2B5EF4-FFF2-40B4-BE49-F238E27FC236}">
+                    <a16:creationId xmlns:a16="http://schemas.microsoft.com/office/drawing/2014/main" id="{F8C6C7FD-963B-B5D3-D654-C876E1BCB893}"/>
+                  </a:ext>
+                </a:extLst>
+              </p:cNvPr>
+              <p:cNvCxnSpPr>
+                <a:cxnSpLocks/>
+                <a:stCxn id="27" idx="1"/>
+              </p:cNvCxnSpPr>
+              <p:nvPr/>
+            </p:nvCxnSpPr>
+            <p:spPr>
+              <a:xfrm>
+                <a:off x="1695636" y="3687520"/>
+                <a:ext cx="215972" cy="602702"/>
+              </a:xfrm>
+              <a:prstGeom prst="line">
+                <a:avLst/>
+              </a:prstGeom>
+            </p:spPr>
+            <p:style>
+              <a:lnRef idx="2">
+                <a:schemeClr val="dk1"/>
+              </a:lnRef>
+              <a:fillRef idx="0">
+                <a:schemeClr val="dk1"/>
+              </a:fillRef>
+              <a:effectRef idx="1">
+                <a:schemeClr val="dk1"/>
+              </a:effectRef>
+              <a:fontRef idx="minor">
+                <a:schemeClr val="tx1"/>
+              </a:fontRef>
+            </p:style>
+          </p:cxnSp>
+          <p:cxnSp>
+            <p:nvCxnSpPr>
+              <p:cNvPr id="36" name="Straight Connector 35">
+                <a:extLst>
+                  <a:ext uri="{FF2B5EF4-FFF2-40B4-BE49-F238E27FC236}">
+                    <a16:creationId xmlns:a16="http://schemas.microsoft.com/office/drawing/2014/main" id="{37F07235-38C7-8B80-B9C1-07D22E2C5244}"/>
+                  </a:ext>
+                </a:extLst>
+              </p:cNvPr>
+              <p:cNvCxnSpPr>
+                <a:cxnSpLocks/>
+              </p:cNvCxnSpPr>
+              <p:nvPr/>
+            </p:nvCxnSpPr>
+            <p:spPr>
+              <a:xfrm>
+                <a:off x="1550998" y="4018401"/>
+                <a:ext cx="132196" cy="102749"/>
+              </a:xfrm>
+              <a:prstGeom prst="line">
+                <a:avLst/>
+              </a:prstGeom>
+            </p:spPr>
+            <p:style>
+              <a:lnRef idx="2">
+                <a:schemeClr val="dk1"/>
+              </a:lnRef>
+              <a:fillRef idx="0">
+                <a:schemeClr val="dk1"/>
+              </a:fillRef>
+              <a:effectRef idx="1">
+                <a:schemeClr val="dk1"/>
+              </a:effectRef>
+              <a:fontRef idx="minor">
+                <a:schemeClr val="tx1"/>
+              </a:fontRef>
+            </p:style>
+          </p:cxnSp>
+          <p:cxnSp>
+            <p:nvCxnSpPr>
+              <p:cNvPr id="39" name="Straight Connector 38">
+                <a:extLst>
+                  <a:ext uri="{FF2B5EF4-FFF2-40B4-BE49-F238E27FC236}">
+                    <a16:creationId xmlns:a16="http://schemas.microsoft.com/office/drawing/2014/main" id="{F5CDB93A-F786-AF72-ECF5-75976C97C9CB}"/>
+                  </a:ext>
+                </a:extLst>
+              </p:cNvPr>
+              <p:cNvCxnSpPr>
+                <a:cxnSpLocks/>
+              </p:cNvCxnSpPr>
+              <p:nvPr/>
+            </p:nvCxnSpPr>
+            <p:spPr>
+              <a:xfrm>
+                <a:off x="1460432" y="4177725"/>
+                <a:ext cx="222762" cy="165675"/>
+              </a:xfrm>
+              <a:prstGeom prst="line">
+                <a:avLst/>
+              </a:prstGeom>
+            </p:spPr>
+            <p:style>
+              <a:lnRef idx="2">
+                <a:schemeClr val="dk1"/>
+              </a:lnRef>
+              <a:fillRef idx="0">
+                <a:schemeClr val="dk1"/>
+              </a:fillRef>
+              <a:effectRef idx="1">
+                <a:schemeClr val="dk1"/>
+              </a:effectRef>
+              <a:fontRef idx="minor">
+                <a:schemeClr val="tx1"/>
+              </a:fontRef>
+            </p:style>
+          </p:cxnSp>
+          <p:cxnSp>
+            <p:nvCxnSpPr>
+              <p:cNvPr id="41" name="Straight Connector 40">
+                <a:extLst>
+                  <a:ext uri="{FF2B5EF4-FFF2-40B4-BE49-F238E27FC236}">
+                    <a16:creationId xmlns:a16="http://schemas.microsoft.com/office/drawing/2014/main" id="{9CDEA3B9-764D-F053-37AA-CA8714CFF543}"/>
+                  </a:ext>
+                </a:extLst>
+              </p:cNvPr>
+              <p:cNvCxnSpPr>
+                <a:cxnSpLocks/>
+              </p:cNvCxnSpPr>
+              <p:nvPr/>
+            </p:nvCxnSpPr>
+            <p:spPr>
+              <a:xfrm flipV="1">
+                <a:off x="1695450" y="4011572"/>
+                <a:ext cx="132196" cy="109258"/>
+              </a:xfrm>
+              <a:prstGeom prst="line">
+                <a:avLst/>
+              </a:prstGeom>
+            </p:spPr>
+            <p:style>
+              <a:lnRef idx="2">
+                <a:schemeClr val="dk1"/>
+              </a:lnRef>
+              <a:fillRef idx="0">
+                <a:schemeClr val="dk1"/>
+              </a:fillRef>
+              <a:effectRef idx="1">
+                <a:schemeClr val="dk1"/>
+              </a:effectRef>
+              <a:fontRef idx="minor">
+                <a:schemeClr val="tx1"/>
+              </a:fontRef>
+            </p:style>
+          </p:cxnSp>
+          <p:cxnSp>
+            <p:nvCxnSpPr>
+              <p:cNvPr id="45" name="Straight Connector 44">
+                <a:extLst>
+                  <a:ext uri="{FF2B5EF4-FFF2-40B4-BE49-F238E27FC236}">
+                    <a16:creationId xmlns:a16="http://schemas.microsoft.com/office/drawing/2014/main" id="{96764FCB-89D5-E624-FEE7-76A60E0C5D96}"/>
+                  </a:ext>
+                </a:extLst>
+              </p:cNvPr>
+              <p:cNvCxnSpPr>
+                <a:cxnSpLocks/>
+              </p:cNvCxnSpPr>
+              <p:nvPr/>
+            </p:nvCxnSpPr>
+            <p:spPr>
+              <a:xfrm flipV="1">
+                <a:off x="1695450" y="4177725"/>
+                <a:ext cx="197072" cy="154124"/>
+              </a:xfrm>
+              <a:prstGeom prst="line">
+                <a:avLst/>
+              </a:prstGeom>
+            </p:spPr>
+            <p:style>
+              <a:lnRef idx="2">
+                <a:schemeClr val="dk1"/>
+              </a:lnRef>
+              <a:fillRef idx="0">
+                <a:schemeClr val="dk1"/>
+              </a:fillRef>
+              <a:effectRef idx="1">
+                <a:schemeClr val="dk1"/>
+              </a:effectRef>
+              <a:fontRef idx="minor">
+                <a:schemeClr val="tx1"/>
+              </a:fontRef>
+            </p:style>
+          </p:cxnSp>
+        </p:grpSp>
+        <p:sp>
+          <p:nvSpPr>
+            <p:cNvPr id="60" name="Freeform: Shape 59">
+              <a:extLst>
+                <a:ext uri="{FF2B5EF4-FFF2-40B4-BE49-F238E27FC236}">
+                  <a16:creationId xmlns:a16="http://schemas.microsoft.com/office/drawing/2014/main" id="{E180B6AC-C245-4E31-5A99-AA8DA4F6F97F}"/>
+                </a:ext>
+              </a:extLst>
+            </p:cNvPr>
+            <p:cNvSpPr/>
+            <p:nvPr/>
+          </p:nvSpPr>
+          <p:spPr>
+            <a:xfrm>
+              <a:off x="2595647" y="4161382"/>
+              <a:ext cx="7725103" cy="716910"/>
+            </a:xfrm>
+            <a:custGeom>
+              <a:avLst/>
+              <a:gdLst>
+                <a:gd name="connsiteX0" fmla="*/ 0 w 8147050"/>
+                <a:gd name="connsiteY0" fmla="*/ 2019331 h 2019331"/>
+                <a:gd name="connsiteX1" fmla="*/ 4070350 w 8147050"/>
+                <a:gd name="connsiteY1" fmla="*/ 31 h 2019331"/>
+                <a:gd name="connsiteX2" fmla="*/ 8147050 w 8147050"/>
+                <a:gd name="connsiteY2" fmla="*/ 1968531 h 2019331"/>
+              </a:gdLst>
+              <a:ahLst/>
+              <a:cxnLst>
+                <a:cxn ang="0">
+                  <a:pos x="connsiteX0" y="connsiteY0"/>
+                </a:cxn>
+                <a:cxn ang="0">
+                  <a:pos x="connsiteX1" y="connsiteY1"/>
+                </a:cxn>
+                <a:cxn ang="0">
+                  <a:pos x="connsiteX2" y="connsiteY2"/>
+                </a:cxn>
+              </a:cxnLst>
+              <a:rect l="l" t="t" r="r" b="b"/>
+              <a:pathLst>
+                <a:path w="8147050" h="2019331">
+                  <a:moveTo>
+                    <a:pt x="0" y="2019331"/>
+                  </a:moveTo>
+                  <a:cubicBezTo>
+                    <a:pt x="1356254" y="1013914"/>
+                    <a:pt x="2712508" y="8498"/>
+                    <a:pt x="4070350" y="31"/>
+                  </a:cubicBezTo>
+                  <a:cubicBezTo>
+                    <a:pt x="5428192" y="-8436"/>
+                    <a:pt x="7414683" y="1683839"/>
+                    <a:pt x="8147050" y="1968531"/>
+                  </a:cubicBezTo>
+                </a:path>
+              </a:pathLst>
+            </a:custGeom>
+            <a:noFill/>
+          </p:spPr>
+          <p:style>
+            <a:lnRef idx="2">
+              <a:schemeClr val="accent1">
+                <a:shade val="15000"/>
+              </a:schemeClr>
+            </a:lnRef>
+            <a:fillRef idx="1">
+              <a:schemeClr val="accent1"/>
+            </a:fillRef>
+            <a:effectRef idx="0">
+              <a:schemeClr val="accent1"/>
+            </a:effectRef>
+            <a:fontRef idx="minor">
+              <a:schemeClr val="lt1"/>
+            </a:fontRef>
+          </p:style>
+          <p:txBody>
+            <a:bodyPr rtlCol="0" anchor="ctr"/>
+            <a:lstStyle/>
+            <a:p>
+              <a:pPr algn="ctr"/>
+              <a:endParaRPr lang="en-US"/>
+            </a:p>
+          </p:txBody>
+        </p:sp>
+        <p:grpSp>
+          <p:nvGrpSpPr>
+            <p:cNvPr id="69" name="Group 68">
+              <a:extLst>
+                <a:ext uri="{FF2B5EF4-FFF2-40B4-BE49-F238E27FC236}">
+                  <a16:creationId xmlns:a16="http://schemas.microsoft.com/office/drawing/2014/main" id="{C5982FF9-F3B0-521E-0AA4-7DE86B1DB8E0}"/>
+                </a:ext>
+              </a:extLst>
+            </p:cNvPr>
+            <p:cNvGrpSpPr/>
+            <p:nvPr/>
+          </p:nvGrpSpPr>
+          <p:grpSpPr>
+            <a:xfrm>
+              <a:off x="2469303" y="1695104"/>
+              <a:ext cx="7759023" cy="1880865"/>
+              <a:chOff x="844550" y="2126351"/>
+              <a:chExt cx="8159750" cy="1549431"/>
+            </a:xfrm>
+          </p:grpSpPr>
+          <p:sp>
+            <p:nvSpPr>
+              <p:cNvPr id="61" name="Freeform: Shape 60">
+                <a:extLst>
+                  <a:ext uri="{FF2B5EF4-FFF2-40B4-BE49-F238E27FC236}">
+                    <a16:creationId xmlns:a16="http://schemas.microsoft.com/office/drawing/2014/main" id="{298CFCA0-762A-A0A5-3789-320A268F4EB4}"/>
+                  </a:ext>
+                </a:extLst>
+              </p:cNvPr>
+              <p:cNvSpPr/>
+              <p:nvPr/>
+            </p:nvSpPr>
+            <p:spPr>
+              <a:xfrm>
+                <a:off x="844550" y="2932487"/>
+                <a:ext cx="8147050" cy="590581"/>
+              </a:xfrm>
+              <a:custGeom>
+                <a:avLst/>
+                <a:gdLst>
+                  <a:gd name="connsiteX0" fmla="*/ 0 w 8147050"/>
+                  <a:gd name="connsiteY0" fmla="*/ 2019331 h 2019331"/>
+                  <a:gd name="connsiteX1" fmla="*/ 4070350 w 8147050"/>
+                  <a:gd name="connsiteY1" fmla="*/ 31 h 2019331"/>
+                  <a:gd name="connsiteX2" fmla="*/ 8147050 w 8147050"/>
+                  <a:gd name="connsiteY2" fmla="*/ 1968531 h 2019331"/>
+                </a:gdLst>
+                <a:ahLst/>
+                <a:cxnLst>
+                  <a:cxn ang="0">
+                    <a:pos x="connsiteX0" y="connsiteY0"/>
+                  </a:cxn>
+                  <a:cxn ang="0">
+                    <a:pos x="connsiteX1" y="connsiteY1"/>
+                  </a:cxn>
+                  <a:cxn ang="0">
+                    <a:pos x="connsiteX2" y="connsiteY2"/>
+                  </a:cxn>
+                </a:cxnLst>
+                <a:rect l="l" t="t" r="r" b="b"/>
+                <a:pathLst>
+                  <a:path w="8147050" h="2019331">
+                    <a:moveTo>
+                      <a:pt x="0" y="2019331"/>
+                    </a:moveTo>
+                    <a:cubicBezTo>
+                      <a:pt x="1356254" y="1013914"/>
+                      <a:pt x="2712508" y="8498"/>
+                      <a:pt x="4070350" y="31"/>
+                    </a:cubicBezTo>
+                    <a:cubicBezTo>
+                      <a:pt x="5428192" y="-8436"/>
+                      <a:pt x="7414683" y="1683839"/>
+                      <a:pt x="8147050" y="1968531"/>
+                    </a:cubicBezTo>
+                  </a:path>
+                </a:pathLst>
+              </a:custGeom>
+              <a:noFill/>
+              <a:ln w="12700">
+                <a:solidFill>
+                  <a:schemeClr val="accent1">
+                    <a:lumMod val="40000"/>
+                    <a:lumOff val="60000"/>
+                  </a:schemeClr>
+                </a:solidFill>
+              </a:ln>
+            </p:spPr>
+            <p:style>
+              <a:lnRef idx="2">
+                <a:schemeClr val="accent1">
+                  <a:shade val="15000"/>
+                </a:schemeClr>
+              </a:lnRef>
+              <a:fillRef idx="1">
+                <a:schemeClr val="accent1"/>
+              </a:fillRef>
+              <a:effectRef idx="0">
+                <a:schemeClr val="accent1"/>
+              </a:effectRef>
+              <a:fontRef idx="minor">
+                <a:schemeClr val="lt1"/>
+              </a:fontRef>
+            </p:style>
+            <p:txBody>
+              <a:bodyPr rtlCol="0" anchor="ctr"/>
+              <a:lstStyle/>
+              <a:p>
+                <a:pPr algn="ctr"/>
+                <a:endParaRPr lang="en-US" dirty="0"/>
+              </a:p>
+            </p:txBody>
+          </p:sp>
+          <p:sp>
+            <p:nvSpPr>
+              <p:cNvPr id="62" name="Freeform: Shape 61">
+                <a:extLst>
+                  <a:ext uri="{FF2B5EF4-FFF2-40B4-BE49-F238E27FC236}">
+                    <a16:creationId xmlns:a16="http://schemas.microsoft.com/office/drawing/2014/main" id="{23C33854-CB7C-E96C-CD3A-88E3EE6C967A}"/>
+                  </a:ext>
+                </a:extLst>
+              </p:cNvPr>
+              <p:cNvSpPr/>
+              <p:nvPr/>
+            </p:nvSpPr>
+            <p:spPr>
+              <a:xfrm>
+                <a:off x="844550" y="3085201"/>
+                <a:ext cx="8147050" cy="590581"/>
+              </a:xfrm>
+              <a:custGeom>
+                <a:avLst/>
+                <a:gdLst>
+                  <a:gd name="connsiteX0" fmla="*/ 0 w 8147050"/>
+                  <a:gd name="connsiteY0" fmla="*/ 2019331 h 2019331"/>
+                  <a:gd name="connsiteX1" fmla="*/ 4070350 w 8147050"/>
+                  <a:gd name="connsiteY1" fmla="*/ 31 h 2019331"/>
+                  <a:gd name="connsiteX2" fmla="*/ 8147050 w 8147050"/>
+                  <a:gd name="connsiteY2" fmla="*/ 1968531 h 2019331"/>
+                </a:gdLst>
+                <a:ahLst/>
+                <a:cxnLst>
+                  <a:cxn ang="0">
+                    <a:pos x="connsiteX0" y="connsiteY0"/>
+                  </a:cxn>
+                  <a:cxn ang="0">
+                    <a:pos x="connsiteX1" y="connsiteY1"/>
+                  </a:cxn>
+                  <a:cxn ang="0">
+                    <a:pos x="connsiteX2" y="connsiteY2"/>
+                  </a:cxn>
+                </a:cxnLst>
+                <a:rect l="l" t="t" r="r" b="b"/>
+                <a:pathLst>
+                  <a:path w="8147050" h="2019331">
+                    <a:moveTo>
+                      <a:pt x="0" y="2019331"/>
+                    </a:moveTo>
+                    <a:cubicBezTo>
+                      <a:pt x="1356254" y="1013914"/>
+                      <a:pt x="2712508" y="8498"/>
+                      <a:pt x="4070350" y="31"/>
+                    </a:cubicBezTo>
+                    <a:cubicBezTo>
+                      <a:pt x="5428192" y="-8436"/>
+                      <a:pt x="7414683" y="1683839"/>
+                      <a:pt x="8147050" y="1968531"/>
+                    </a:cubicBezTo>
+                  </a:path>
+                </a:pathLst>
+              </a:custGeom>
+              <a:noFill/>
+              <a:ln w="12700"/>
+            </p:spPr>
+            <p:style>
+              <a:lnRef idx="2">
+                <a:schemeClr val="accent1">
+                  <a:shade val="15000"/>
+                </a:schemeClr>
+              </a:lnRef>
+              <a:fillRef idx="1">
+                <a:schemeClr val="accent1"/>
+              </a:fillRef>
+              <a:effectRef idx="0">
+                <a:schemeClr val="accent1"/>
+              </a:effectRef>
+              <a:fontRef idx="minor">
+                <a:schemeClr val="lt1"/>
+              </a:fontRef>
+            </p:style>
+            <p:txBody>
+              <a:bodyPr rtlCol="0" anchor="ctr"/>
+              <a:lstStyle/>
+              <a:p>
+                <a:pPr algn="ctr"/>
+                <a:endParaRPr lang="en-US"/>
+              </a:p>
+            </p:txBody>
+          </p:sp>
+          <p:sp>
+            <p:nvSpPr>
+              <p:cNvPr id="63" name="Freeform: Shape 62">
+                <a:extLst>
+                  <a:ext uri="{FF2B5EF4-FFF2-40B4-BE49-F238E27FC236}">
+                    <a16:creationId xmlns:a16="http://schemas.microsoft.com/office/drawing/2014/main" id="{CA9F9B4E-3EE6-87BD-3DD8-224288B9BE29}"/>
+                  </a:ext>
+                </a:extLst>
+              </p:cNvPr>
+              <p:cNvSpPr/>
+              <p:nvPr/>
+            </p:nvSpPr>
+            <p:spPr>
+              <a:xfrm>
+                <a:off x="850900" y="2678801"/>
+                <a:ext cx="8147050" cy="590581"/>
+              </a:xfrm>
+              <a:custGeom>
+                <a:avLst/>
+                <a:gdLst>
+                  <a:gd name="connsiteX0" fmla="*/ 0 w 8147050"/>
+                  <a:gd name="connsiteY0" fmla="*/ 2019331 h 2019331"/>
+                  <a:gd name="connsiteX1" fmla="*/ 4070350 w 8147050"/>
+                  <a:gd name="connsiteY1" fmla="*/ 31 h 2019331"/>
+                  <a:gd name="connsiteX2" fmla="*/ 8147050 w 8147050"/>
+                  <a:gd name="connsiteY2" fmla="*/ 1968531 h 2019331"/>
+                </a:gdLst>
+                <a:ahLst/>
+                <a:cxnLst>
+                  <a:cxn ang="0">
+                    <a:pos x="connsiteX0" y="connsiteY0"/>
+                  </a:cxn>
+                  <a:cxn ang="0">
+                    <a:pos x="connsiteX1" y="connsiteY1"/>
+                  </a:cxn>
+                  <a:cxn ang="0">
+                    <a:pos x="connsiteX2" y="connsiteY2"/>
+                  </a:cxn>
+                </a:cxnLst>
+                <a:rect l="l" t="t" r="r" b="b"/>
+                <a:pathLst>
+                  <a:path w="8147050" h="2019331">
+                    <a:moveTo>
+                      <a:pt x="0" y="2019331"/>
+                    </a:moveTo>
+                    <a:cubicBezTo>
+                      <a:pt x="1356254" y="1013914"/>
+                      <a:pt x="2712508" y="8498"/>
+                      <a:pt x="4070350" y="31"/>
+                    </a:cubicBezTo>
+                    <a:cubicBezTo>
+                      <a:pt x="5428192" y="-8436"/>
+                      <a:pt x="7414683" y="1683839"/>
+                      <a:pt x="8147050" y="1968531"/>
+                    </a:cubicBezTo>
+                  </a:path>
+                </a:pathLst>
+              </a:custGeom>
+              <a:noFill/>
+              <a:ln w="12700">
+                <a:solidFill>
+                  <a:schemeClr val="tx2">
+                    <a:lumMod val="50000"/>
+                    <a:lumOff val="50000"/>
+                  </a:schemeClr>
+                </a:solidFill>
+              </a:ln>
+            </p:spPr>
+            <p:style>
+              <a:lnRef idx="2">
+                <a:schemeClr val="accent1">
+                  <a:shade val="15000"/>
+                </a:schemeClr>
+              </a:lnRef>
+              <a:fillRef idx="1">
+                <a:schemeClr val="accent1"/>
+              </a:fillRef>
+              <a:effectRef idx="0">
+                <a:schemeClr val="accent1"/>
+              </a:effectRef>
+              <a:fontRef idx="minor">
+                <a:schemeClr val="lt1"/>
+              </a:fontRef>
+            </p:style>
+            <p:txBody>
+              <a:bodyPr rtlCol="0" anchor="ctr"/>
+              <a:lstStyle/>
+              <a:p>
+                <a:pPr algn="ctr"/>
+                <a:endParaRPr lang="en-US" dirty="0"/>
+              </a:p>
+            </p:txBody>
+          </p:sp>
+          <p:sp>
+            <p:nvSpPr>
+              <p:cNvPr id="64" name="Freeform: Shape 63">
+                <a:extLst>
+                  <a:ext uri="{FF2B5EF4-FFF2-40B4-BE49-F238E27FC236}">
+                    <a16:creationId xmlns:a16="http://schemas.microsoft.com/office/drawing/2014/main" id="{E4BE111F-7DC2-06A0-34F6-B7022A12C974}"/>
+                  </a:ext>
+                </a:extLst>
+              </p:cNvPr>
+              <p:cNvSpPr/>
+              <p:nvPr/>
+            </p:nvSpPr>
+            <p:spPr>
+              <a:xfrm>
+                <a:off x="857250" y="2126351"/>
+                <a:ext cx="8147050" cy="590581"/>
+              </a:xfrm>
+              <a:custGeom>
+                <a:avLst/>
+                <a:gdLst>
+                  <a:gd name="connsiteX0" fmla="*/ 0 w 8147050"/>
+                  <a:gd name="connsiteY0" fmla="*/ 2019331 h 2019331"/>
+                  <a:gd name="connsiteX1" fmla="*/ 4070350 w 8147050"/>
+                  <a:gd name="connsiteY1" fmla="*/ 31 h 2019331"/>
+                  <a:gd name="connsiteX2" fmla="*/ 8147050 w 8147050"/>
+                  <a:gd name="connsiteY2" fmla="*/ 1968531 h 2019331"/>
+                </a:gdLst>
+                <a:ahLst/>
+                <a:cxnLst>
+                  <a:cxn ang="0">
+                    <a:pos x="connsiteX0" y="connsiteY0"/>
+                  </a:cxn>
+                  <a:cxn ang="0">
+                    <a:pos x="connsiteX1" y="connsiteY1"/>
+                  </a:cxn>
+                  <a:cxn ang="0">
+                    <a:pos x="connsiteX2" y="connsiteY2"/>
+                  </a:cxn>
+                </a:cxnLst>
+                <a:rect l="l" t="t" r="r" b="b"/>
+                <a:pathLst>
+                  <a:path w="8147050" h="2019331">
+                    <a:moveTo>
+                      <a:pt x="0" y="2019331"/>
+                    </a:moveTo>
+                    <a:cubicBezTo>
+                      <a:pt x="1356254" y="1013914"/>
+                      <a:pt x="2712508" y="8498"/>
+                      <a:pt x="4070350" y="31"/>
+                    </a:cubicBezTo>
+                    <a:cubicBezTo>
+                      <a:pt x="5428192" y="-8436"/>
+                      <a:pt x="7414683" y="1683839"/>
+                      <a:pt x="8147050" y="1968531"/>
+                    </a:cubicBezTo>
+                  </a:path>
+                </a:pathLst>
+              </a:custGeom>
+              <a:noFill/>
+              <a:ln w="12700">
+                <a:solidFill>
+                  <a:schemeClr val="tx2">
+                    <a:lumMod val="90000"/>
+                    <a:lumOff val="10000"/>
+                  </a:schemeClr>
+                </a:solidFill>
+              </a:ln>
+            </p:spPr>
+            <p:style>
+              <a:lnRef idx="2">
+                <a:schemeClr val="accent1">
+                  <a:shade val="15000"/>
+                </a:schemeClr>
+              </a:lnRef>
+              <a:fillRef idx="1">
+                <a:schemeClr val="accent1"/>
+              </a:fillRef>
+              <a:effectRef idx="0">
+                <a:schemeClr val="accent1"/>
+              </a:effectRef>
+              <a:fontRef idx="minor">
+                <a:schemeClr val="lt1"/>
+              </a:fontRef>
+            </p:style>
+            <p:txBody>
+              <a:bodyPr rtlCol="0" anchor="ctr"/>
+              <a:lstStyle/>
+              <a:p>
+                <a:pPr algn="ctr"/>
+                <a:endParaRPr lang="en-US"/>
+              </a:p>
+            </p:txBody>
+          </p:sp>
+          <p:sp>
+            <p:nvSpPr>
+              <p:cNvPr id="66" name="TextBox 65">
+                <a:extLst>
+                  <a:ext uri="{FF2B5EF4-FFF2-40B4-BE49-F238E27FC236}">
+                    <a16:creationId xmlns:a16="http://schemas.microsoft.com/office/drawing/2014/main" id="{F8C55793-9539-1FD9-BBBC-C7972CAA168B}"/>
+                  </a:ext>
+                </a:extLst>
+              </p:cNvPr>
+              <p:cNvSpPr txBox="1"/>
+              <p:nvPr/>
+            </p:nvSpPr>
+            <p:spPr>
+              <a:xfrm rot="797264">
+                <a:off x="6550639" y="2558078"/>
+                <a:ext cx="1061025" cy="369332"/>
+              </a:xfrm>
+              <a:prstGeom prst="rect">
+                <a:avLst/>
+              </a:prstGeom>
+              <a:noFill/>
+            </p:spPr>
+            <p:txBody>
+              <a:bodyPr wrap="none" rtlCol="0">
+                <a:spAutoFit/>
+              </a:bodyPr>
+              <a:lstStyle/>
+              <a:p>
+                <a:r>
+                  <a:rPr lang="en-US" dirty="0">
+                    <a:latin typeface="Calibri" panose="020F0502020204030204" pitchFamily="34" charset="0"/>
+                    <a:ea typeface="Calibri" panose="020F0502020204030204" pitchFamily="34" charset="0"/>
+                    <a:cs typeface="Calibri" panose="020F0502020204030204" pitchFamily="34" charset="0"/>
+                  </a:rPr>
+                  <a:t>F-Layer</a:t>
+                </a:r>
+              </a:p>
+            </p:txBody>
+          </p:sp>
+          <p:sp>
+            <p:nvSpPr>
+              <p:cNvPr id="67" name="TextBox 66">
+                <a:extLst>
+                  <a:ext uri="{FF2B5EF4-FFF2-40B4-BE49-F238E27FC236}">
+                    <a16:creationId xmlns:a16="http://schemas.microsoft.com/office/drawing/2014/main" id="{71BB24B2-ADB2-5F1E-0C88-D5DC7D6A0E8E}"/>
+                  </a:ext>
+                </a:extLst>
+              </p:cNvPr>
+              <p:cNvSpPr txBox="1"/>
+              <p:nvPr/>
+            </p:nvSpPr>
+            <p:spPr>
+              <a:xfrm rot="714879">
+                <a:off x="6456688" y="2821454"/>
+                <a:ext cx="1068917" cy="369332"/>
+              </a:xfrm>
+              <a:prstGeom prst="rect">
+                <a:avLst/>
+              </a:prstGeom>
+              <a:noFill/>
+            </p:spPr>
+            <p:txBody>
+              <a:bodyPr wrap="none" rtlCol="0">
+                <a:spAutoFit/>
+              </a:bodyPr>
+              <a:lstStyle/>
+              <a:p>
+                <a:r>
+                  <a:rPr lang="en-US" dirty="0">
+                    <a:latin typeface="Calibri" panose="020F0502020204030204" pitchFamily="34" charset="0"/>
+                    <a:ea typeface="Calibri" panose="020F0502020204030204" pitchFamily="34" charset="0"/>
+                    <a:cs typeface="Calibri" panose="020F0502020204030204" pitchFamily="34" charset="0"/>
+                  </a:rPr>
+                  <a:t>E-Layer</a:t>
+                </a:r>
+              </a:p>
+            </p:txBody>
+          </p:sp>
+          <p:sp>
+            <p:nvSpPr>
+              <p:cNvPr id="68" name="TextBox 67">
+                <a:extLst>
+                  <a:ext uri="{FF2B5EF4-FFF2-40B4-BE49-F238E27FC236}">
+                    <a16:creationId xmlns:a16="http://schemas.microsoft.com/office/drawing/2014/main" id="{9DB3C429-43AF-1E3E-EE7D-E687D97FDED3}"/>
+                  </a:ext>
+                </a:extLst>
+              </p:cNvPr>
+              <p:cNvSpPr txBox="1"/>
+              <p:nvPr/>
+            </p:nvSpPr>
+            <p:spPr>
+              <a:xfrm rot="671485">
+                <a:off x="6394074" y="3034484"/>
+                <a:ext cx="1106405" cy="369332"/>
+              </a:xfrm>
+              <a:prstGeom prst="rect">
+                <a:avLst/>
+              </a:prstGeom>
+              <a:noFill/>
+            </p:spPr>
+            <p:txBody>
+              <a:bodyPr wrap="none" rtlCol="0">
+                <a:spAutoFit/>
+              </a:bodyPr>
+              <a:lstStyle/>
+              <a:p>
+                <a:r>
+                  <a:rPr lang="en-US" dirty="0">
+                    <a:latin typeface="Calibri" panose="020F0502020204030204" pitchFamily="34" charset="0"/>
+                    <a:ea typeface="Calibri" panose="020F0502020204030204" pitchFamily="34" charset="0"/>
+                    <a:cs typeface="Calibri" panose="020F0502020204030204" pitchFamily="34" charset="0"/>
+                  </a:rPr>
+                  <a:t>D-Layer</a:t>
+                </a:r>
+              </a:p>
+            </p:txBody>
+          </p:sp>
+        </p:grpSp>
+        <p:sp>
+          <p:nvSpPr>
+            <p:cNvPr id="72" name="Rectangle: Rounded Corners 71">
+              <a:extLst>
+                <a:ext uri="{FF2B5EF4-FFF2-40B4-BE49-F238E27FC236}">
+                  <a16:creationId xmlns:a16="http://schemas.microsoft.com/office/drawing/2014/main" id="{6354F93E-6839-E2CD-D3AC-42375DA7ACCB}"/>
+                </a:ext>
+              </a:extLst>
+            </p:cNvPr>
+            <p:cNvSpPr/>
+            <p:nvPr/>
+          </p:nvSpPr>
+          <p:spPr>
+            <a:xfrm rot="258862">
+              <a:off x="7039992" y="4070354"/>
+              <a:ext cx="133776" cy="122279"/>
+            </a:xfrm>
+            <a:prstGeom prst="roundRect">
+              <a:avLst/>
+            </a:prstGeom>
+          </p:spPr>
+          <p:style>
+            <a:lnRef idx="2">
+              <a:schemeClr val="dk1">
+                <a:shade val="15000"/>
+              </a:schemeClr>
+            </a:lnRef>
+            <a:fillRef idx="1">
+              <a:schemeClr val="dk1"/>
+            </a:fillRef>
+            <a:effectRef idx="0">
+              <a:schemeClr val="dk1"/>
+            </a:effectRef>
+            <a:fontRef idx="minor">
+              <a:schemeClr val="lt1"/>
+            </a:fontRef>
+          </p:style>
+          <p:txBody>
+            <a:bodyPr rtlCol="0" anchor="ctr"/>
+            <a:lstStyle/>
+            <a:p>
+              <a:pPr algn="ctr"/>
+              <a:endParaRPr lang="en-US"/>
+            </a:p>
+          </p:txBody>
+        </p:sp>
+        <p:sp>
+          <p:nvSpPr>
+            <p:cNvPr id="74" name="Rectangle: Rounded Corners 73">
+              <a:extLst>
+                <a:ext uri="{FF2B5EF4-FFF2-40B4-BE49-F238E27FC236}">
+                  <a16:creationId xmlns:a16="http://schemas.microsoft.com/office/drawing/2014/main" id="{C19DAE97-C087-85C9-9D7C-D86BFAB2DCE8}"/>
+                </a:ext>
+              </a:extLst>
+            </p:cNvPr>
+            <p:cNvSpPr/>
+            <p:nvPr/>
+          </p:nvSpPr>
+          <p:spPr>
+            <a:xfrm rot="885761">
+              <a:off x="8883131" y="4409520"/>
+              <a:ext cx="133776" cy="122279"/>
+            </a:xfrm>
+            <a:prstGeom prst="roundRect">
+              <a:avLst/>
+            </a:prstGeom>
+          </p:spPr>
+          <p:style>
+            <a:lnRef idx="2">
+              <a:schemeClr val="dk1">
+                <a:shade val="15000"/>
+              </a:schemeClr>
+            </a:lnRef>
+            <a:fillRef idx="1">
+              <a:schemeClr val="dk1"/>
+            </a:fillRef>
+            <a:effectRef idx="0">
+              <a:schemeClr val="dk1"/>
+            </a:effectRef>
+            <a:fontRef idx="minor">
+              <a:schemeClr val="lt1"/>
+            </a:fontRef>
+          </p:style>
+          <p:txBody>
+            <a:bodyPr rtlCol="0" anchor="ctr"/>
+            <a:lstStyle/>
+            <a:p>
+              <a:pPr algn="ctr"/>
+              <a:endParaRPr lang="en-US"/>
+            </a:p>
+          </p:txBody>
+        </p:sp>
+        <p:sp>
+          <p:nvSpPr>
+            <p:cNvPr id="78" name="Freeform: Shape 77">
+              <a:extLst>
+                <a:ext uri="{FF2B5EF4-FFF2-40B4-BE49-F238E27FC236}">
+                  <a16:creationId xmlns:a16="http://schemas.microsoft.com/office/drawing/2014/main" id="{F033AC82-D82E-DB4D-5DBB-43564BFA02B9}"/>
+                </a:ext>
+              </a:extLst>
+            </p:cNvPr>
+            <p:cNvSpPr/>
+            <p:nvPr/>
+          </p:nvSpPr>
+          <p:spPr>
+            <a:xfrm>
+              <a:off x="3160480" y="2658050"/>
+              <a:ext cx="3886943" cy="1643553"/>
+            </a:xfrm>
+            <a:custGeom>
+              <a:avLst/>
+              <a:gdLst>
+                <a:gd name="connsiteX0" fmla="*/ 0 w 3321050"/>
+                <a:gd name="connsiteY0" fmla="*/ 1353937 h 1353937"/>
+                <a:gd name="connsiteX1" fmla="*/ 1041400 w 3321050"/>
+                <a:gd name="connsiteY1" fmla="*/ 1387 h 1353937"/>
+                <a:gd name="connsiteX2" fmla="*/ 3321050 w 3321050"/>
+                <a:gd name="connsiteY2" fmla="*/ 1150737 h 1353937"/>
+              </a:gdLst>
+              <a:ahLst/>
+              <a:cxnLst>
+                <a:cxn ang="0">
+                  <a:pos x="connsiteX0" y="connsiteY0"/>
+                </a:cxn>
+                <a:cxn ang="0">
+                  <a:pos x="connsiteX1" y="connsiteY1"/>
+                </a:cxn>
+                <a:cxn ang="0">
+                  <a:pos x="connsiteX2" y="connsiteY2"/>
+                </a:cxn>
+              </a:cxnLst>
+              <a:rect l="l" t="t" r="r" b="b"/>
+              <a:pathLst>
+                <a:path w="3321050" h="1353937">
+                  <a:moveTo>
+                    <a:pt x="0" y="1353937"/>
+                  </a:moveTo>
+                  <a:cubicBezTo>
+                    <a:pt x="243946" y="694595"/>
+                    <a:pt x="487892" y="35254"/>
+                    <a:pt x="1041400" y="1387"/>
+                  </a:cubicBezTo>
+                  <a:cubicBezTo>
+                    <a:pt x="1594908" y="-32480"/>
+                    <a:pt x="2457979" y="559128"/>
+                    <a:pt x="3321050" y="1150737"/>
+                  </a:cubicBezTo>
+                </a:path>
+              </a:pathLst>
+            </a:custGeom>
+            <a:ln>
+              <a:solidFill>
+                <a:schemeClr val="accent5">
+                  <a:lumMod val="75000"/>
+                </a:schemeClr>
+              </a:solidFill>
+            </a:ln>
+          </p:spPr>
+          <p:style>
+            <a:lnRef idx="1">
+              <a:schemeClr val="accent2"/>
+            </a:lnRef>
+            <a:fillRef idx="0">
+              <a:schemeClr val="accent2"/>
+            </a:fillRef>
+            <a:effectRef idx="0">
+              <a:schemeClr val="accent2"/>
+            </a:effectRef>
+            <a:fontRef idx="minor">
+              <a:schemeClr val="tx1"/>
+            </a:fontRef>
+          </p:style>
+          <p:txBody>
+            <a:bodyPr rtlCol="0" anchor="ctr"/>
+            <a:lstStyle/>
+            <a:p>
+              <a:pPr algn="ctr"/>
+              <a:endParaRPr lang="en-US"/>
+            </a:p>
+          </p:txBody>
+        </p:sp>
+        <p:sp>
+          <p:nvSpPr>
+            <p:cNvPr id="79" name="Freeform: Shape 78">
+              <a:extLst>
+                <a:ext uri="{FF2B5EF4-FFF2-40B4-BE49-F238E27FC236}">
+                  <a16:creationId xmlns:a16="http://schemas.microsoft.com/office/drawing/2014/main" id="{E3A6227F-955D-2A68-0BF6-6E6D834634B7}"/>
+                </a:ext>
+              </a:extLst>
+            </p:cNvPr>
+            <p:cNvSpPr/>
+            <p:nvPr/>
+          </p:nvSpPr>
+          <p:spPr>
+            <a:xfrm>
+              <a:off x="3167912" y="1904123"/>
+              <a:ext cx="5730083" cy="2520814"/>
+            </a:xfrm>
+            <a:custGeom>
+              <a:avLst/>
+              <a:gdLst>
+                <a:gd name="connsiteX0" fmla="*/ 0 w 4895850"/>
+                <a:gd name="connsiteY0" fmla="*/ 1987712 h 2076612"/>
+                <a:gd name="connsiteX1" fmla="*/ 2133600 w 4895850"/>
+                <a:gd name="connsiteY1" fmla="*/ 162 h 2076612"/>
+                <a:gd name="connsiteX2" fmla="*/ 4895850 w 4895850"/>
+                <a:gd name="connsiteY2" fmla="*/ 2076612 h 2076612"/>
+              </a:gdLst>
+              <a:ahLst/>
+              <a:cxnLst>
+                <a:cxn ang="0">
+                  <a:pos x="connsiteX0" y="connsiteY0"/>
+                </a:cxn>
+                <a:cxn ang="0">
+                  <a:pos x="connsiteX1" y="connsiteY1"/>
+                </a:cxn>
+                <a:cxn ang="0">
+                  <a:pos x="connsiteX2" y="connsiteY2"/>
+                </a:cxn>
+              </a:cxnLst>
+              <a:rect l="l" t="t" r="r" b="b"/>
+              <a:pathLst>
+                <a:path w="4895850" h="2076612">
+                  <a:moveTo>
+                    <a:pt x="0" y="1987712"/>
+                  </a:moveTo>
+                  <a:cubicBezTo>
+                    <a:pt x="658812" y="986528"/>
+                    <a:pt x="1317625" y="-14655"/>
+                    <a:pt x="2133600" y="162"/>
+                  </a:cubicBezTo>
+                  <a:cubicBezTo>
+                    <a:pt x="2949575" y="14979"/>
+                    <a:pt x="3922712" y="1045795"/>
+                    <a:pt x="4895850" y="2076612"/>
+                  </a:cubicBezTo>
+                </a:path>
+              </a:pathLst>
+            </a:custGeom>
+            <a:noFill/>
+            <a:ln>
+              <a:solidFill>
+                <a:srgbClr val="0070C0"/>
+              </a:solidFill>
+            </a:ln>
+          </p:spPr>
+          <p:style>
+            <a:lnRef idx="2">
+              <a:schemeClr val="accent1">
+                <a:shade val="15000"/>
+              </a:schemeClr>
+            </a:lnRef>
+            <a:fillRef idx="1">
+              <a:schemeClr val="accent1"/>
+            </a:fillRef>
+            <a:effectRef idx="0">
+              <a:schemeClr val="accent1"/>
+            </a:effectRef>
+            <a:fontRef idx="minor">
+              <a:schemeClr val="lt1"/>
+            </a:fontRef>
+          </p:style>
+          <p:txBody>
+            <a:bodyPr rtlCol="0" anchor="ctr"/>
+            <a:lstStyle/>
+            <a:p>
+              <a:pPr algn="ctr"/>
+              <a:endParaRPr lang="en-US"/>
+            </a:p>
+          </p:txBody>
+        </p:sp>
+        <p:grpSp>
+          <p:nvGrpSpPr>
+            <p:cNvPr id="86" name="Group 85">
+              <a:extLst>
+                <a:ext uri="{FF2B5EF4-FFF2-40B4-BE49-F238E27FC236}">
+                  <a16:creationId xmlns:a16="http://schemas.microsoft.com/office/drawing/2014/main" id="{BF6A6476-A55A-E030-22E3-FE5516503A02}"/>
+                </a:ext>
+              </a:extLst>
+            </p:cNvPr>
+            <p:cNvGrpSpPr/>
+            <p:nvPr/>
+          </p:nvGrpSpPr>
+          <p:grpSpPr>
+            <a:xfrm>
+              <a:off x="5122532" y="1788498"/>
+              <a:ext cx="817522" cy="577266"/>
+              <a:chOff x="3111500" y="2203288"/>
+              <a:chExt cx="698500" cy="475544"/>
+            </a:xfrm>
+          </p:grpSpPr>
+          <p:cxnSp>
+            <p:nvCxnSpPr>
+              <p:cNvPr id="81" name="Straight Connector 80">
+                <a:extLst>
+                  <a:ext uri="{FF2B5EF4-FFF2-40B4-BE49-F238E27FC236}">
+                    <a16:creationId xmlns:a16="http://schemas.microsoft.com/office/drawing/2014/main" id="{BEAAD8B3-8F4D-FE92-7B38-8EAC6405CF0C}"/>
+                  </a:ext>
+                </a:extLst>
+              </p:cNvPr>
+              <p:cNvCxnSpPr/>
+              <p:nvPr/>
+            </p:nvCxnSpPr>
+            <p:spPr>
+              <a:xfrm>
+                <a:off x="3111500" y="2260438"/>
+                <a:ext cx="387350" cy="418394"/>
+              </a:xfrm>
+              <a:prstGeom prst="line">
+                <a:avLst/>
+              </a:prstGeom>
+            </p:spPr>
+            <p:style>
+              <a:lnRef idx="3">
+                <a:schemeClr val="accent1"/>
+              </a:lnRef>
+              <a:fillRef idx="0">
+                <a:schemeClr val="accent1"/>
+              </a:fillRef>
+              <a:effectRef idx="2">
+                <a:schemeClr val="accent1"/>
+              </a:effectRef>
+              <a:fontRef idx="minor">
+                <a:schemeClr val="tx1"/>
+              </a:fontRef>
+            </p:style>
+          </p:cxnSp>
+          <p:cxnSp>
+            <p:nvCxnSpPr>
+              <p:cNvPr id="82" name="Straight Connector 81">
+                <a:extLst>
+                  <a:ext uri="{FF2B5EF4-FFF2-40B4-BE49-F238E27FC236}">
+                    <a16:creationId xmlns:a16="http://schemas.microsoft.com/office/drawing/2014/main" id="{EB24E15A-23AC-5152-FF3F-63815DBF1DE8}"/>
+                  </a:ext>
+                </a:extLst>
+              </p:cNvPr>
+              <p:cNvCxnSpPr/>
+              <p:nvPr/>
+            </p:nvCxnSpPr>
+            <p:spPr>
+              <a:xfrm>
+                <a:off x="3270250" y="2228688"/>
+                <a:ext cx="387350" cy="418394"/>
+              </a:xfrm>
+              <a:prstGeom prst="line">
+                <a:avLst/>
+              </a:prstGeom>
+            </p:spPr>
+            <p:style>
+              <a:lnRef idx="3">
+                <a:schemeClr val="accent1"/>
+              </a:lnRef>
+              <a:fillRef idx="0">
+                <a:schemeClr val="accent1"/>
+              </a:fillRef>
+              <a:effectRef idx="2">
+                <a:schemeClr val="accent1"/>
+              </a:effectRef>
+              <a:fontRef idx="minor">
+                <a:schemeClr val="tx1"/>
+              </a:fontRef>
+            </p:style>
+          </p:cxnSp>
+          <p:cxnSp>
+            <p:nvCxnSpPr>
+              <p:cNvPr id="85" name="Straight Connector 84">
+                <a:extLst>
+                  <a:ext uri="{FF2B5EF4-FFF2-40B4-BE49-F238E27FC236}">
+                    <a16:creationId xmlns:a16="http://schemas.microsoft.com/office/drawing/2014/main" id="{4FFB77C5-9D2F-4582-E941-DBEB3A6B7044}"/>
+                  </a:ext>
+                </a:extLst>
+              </p:cNvPr>
+              <p:cNvCxnSpPr/>
+              <p:nvPr/>
+            </p:nvCxnSpPr>
+            <p:spPr>
+              <a:xfrm>
+                <a:off x="3422650" y="2203288"/>
+                <a:ext cx="387350" cy="418394"/>
+              </a:xfrm>
+              <a:prstGeom prst="line">
+                <a:avLst/>
+              </a:prstGeom>
+            </p:spPr>
+            <p:style>
+              <a:lnRef idx="3">
+                <a:schemeClr val="accent1"/>
+              </a:lnRef>
+              <a:fillRef idx="0">
+                <a:schemeClr val="accent1"/>
+              </a:fillRef>
+              <a:effectRef idx="2">
+                <a:schemeClr val="accent1"/>
+              </a:effectRef>
+              <a:fontRef idx="minor">
+                <a:schemeClr val="tx1"/>
+              </a:fontRef>
+            </p:style>
+          </p:cxnSp>
+        </p:grpSp>
+        <p:sp>
+          <p:nvSpPr>
+            <p:cNvPr id="87" name="Freeform: Shape 86">
+              <a:extLst>
+                <a:ext uri="{FF2B5EF4-FFF2-40B4-BE49-F238E27FC236}">
+                  <a16:creationId xmlns:a16="http://schemas.microsoft.com/office/drawing/2014/main" id="{3437C0B5-D243-FC11-19E3-85F3FAAF1197}"/>
+                </a:ext>
+              </a:extLst>
+            </p:cNvPr>
+            <p:cNvSpPr/>
+            <p:nvPr/>
+          </p:nvSpPr>
+          <p:spPr>
+            <a:xfrm>
+              <a:off x="3175344" y="2135569"/>
+              <a:ext cx="2177580" cy="2150618"/>
+            </a:xfrm>
+            <a:custGeom>
+              <a:avLst/>
+              <a:gdLst>
+                <a:gd name="connsiteX0" fmla="*/ 0 w 1860550"/>
+                <a:gd name="connsiteY0" fmla="*/ 1771650 h 1771650"/>
+                <a:gd name="connsiteX1" fmla="*/ 838200 w 1860550"/>
+                <a:gd name="connsiteY1" fmla="*/ 406400 h 1771650"/>
+                <a:gd name="connsiteX2" fmla="*/ 1860550 w 1860550"/>
+                <a:gd name="connsiteY2" fmla="*/ 0 h 1771650"/>
+              </a:gdLst>
+              <a:ahLst/>
+              <a:cxnLst>
+                <a:cxn ang="0">
+                  <a:pos x="connsiteX0" y="connsiteY0"/>
+                </a:cxn>
+                <a:cxn ang="0">
+                  <a:pos x="connsiteX1" y="connsiteY1"/>
+                </a:cxn>
+                <a:cxn ang="0">
+                  <a:pos x="connsiteX2" y="connsiteY2"/>
+                </a:cxn>
+              </a:cxnLst>
+              <a:rect l="l" t="t" r="r" b="b"/>
+              <a:pathLst>
+                <a:path w="1860550" h="1771650">
+                  <a:moveTo>
+                    <a:pt x="0" y="1771650"/>
+                  </a:moveTo>
+                  <a:cubicBezTo>
+                    <a:pt x="264054" y="1236662"/>
+                    <a:pt x="528109" y="701675"/>
+                    <a:pt x="838200" y="406400"/>
+                  </a:cubicBezTo>
+                  <a:cubicBezTo>
+                    <a:pt x="1148291" y="111125"/>
+                    <a:pt x="1711325" y="50800"/>
+                    <a:pt x="1860550" y="0"/>
+                  </a:cubicBezTo>
+                </a:path>
+              </a:pathLst>
+            </a:custGeom>
+            <a:noFill/>
+            <a:ln>
+              <a:solidFill>
+                <a:srgbClr val="00B050"/>
+              </a:solidFill>
+            </a:ln>
+          </p:spPr>
+          <p:style>
+            <a:lnRef idx="2">
+              <a:schemeClr val="accent1">
+                <a:shade val="15000"/>
+              </a:schemeClr>
+            </a:lnRef>
+            <a:fillRef idx="1">
+              <a:schemeClr val="accent1"/>
+            </a:fillRef>
+            <a:effectRef idx="0">
+              <a:schemeClr val="accent1"/>
+            </a:effectRef>
+            <a:fontRef idx="minor">
+              <a:schemeClr val="lt1"/>
+            </a:fontRef>
+          </p:style>
+          <p:txBody>
+            <a:bodyPr rtlCol="0" anchor="ctr"/>
+            <a:lstStyle/>
+            <a:p>
+              <a:pPr algn="ctr"/>
+              <a:endParaRPr lang="en-US"/>
+            </a:p>
+          </p:txBody>
+        </p:sp>
+        <p:sp>
+          <p:nvSpPr>
+            <p:cNvPr id="88" name="TextBox 87">
+              <a:extLst>
+                <a:ext uri="{FF2B5EF4-FFF2-40B4-BE49-F238E27FC236}">
+                  <a16:creationId xmlns:a16="http://schemas.microsoft.com/office/drawing/2014/main" id="{49AC51FE-218C-365B-9DB9-A0C062312B69}"/>
+                </a:ext>
+              </a:extLst>
+            </p:cNvPr>
+            <p:cNvSpPr txBox="1"/>
+            <p:nvPr/>
+          </p:nvSpPr>
+          <p:spPr>
+            <a:xfrm>
+              <a:off x="5662401" y="1779167"/>
+              <a:ext cx="2411225" cy="784586"/>
+            </a:xfrm>
+            <a:prstGeom prst="rect">
+              <a:avLst/>
+            </a:prstGeom>
+            <a:noFill/>
+          </p:spPr>
+          <p:txBody>
+            <a:bodyPr wrap="square" rtlCol="0">
+              <a:spAutoFit/>
+            </a:bodyPr>
+            <a:lstStyle/>
+            <a:p>
+              <a:r>
+                <a:rPr lang="en-US" dirty="0">
+                  <a:latin typeface="Calibri" panose="020F0502020204030204" pitchFamily="34" charset="0"/>
+                  <a:ea typeface="Calibri" panose="020F0502020204030204" pitchFamily="34" charset="0"/>
+                  <a:cs typeface="Calibri" panose="020F0502020204030204" pitchFamily="34" charset="0"/>
+                </a:rPr>
+                <a:t>Ionospheric Plasma </a:t>
+              </a:r>
+            </a:p>
+            <a:p>
+              <a:r>
+                <a:rPr lang="en-US" dirty="0">
+                  <a:latin typeface="Calibri" panose="020F0502020204030204" pitchFamily="34" charset="0"/>
+                  <a:ea typeface="Calibri" panose="020F0502020204030204" pitchFamily="34" charset="0"/>
+                  <a:cs typeface="Calibri" panose="020F0502020204030204" pitchFamily="34" charset="0"/>
+                </a:rPr>
+                <a:t>Irregularities</a:t>
+              </a:r>
+            </a:p>
+          </p:txBody>
+        </p:sp>
+        <p:sp>
+          <p:nvSpPr>
+            <p:cNvPr id="89" name="TextBox 88">
+              <a:extLst>
+                <a:ext uri="{FF2B5EF4-FFF2-40B4-BE49-F238E27FC236}">
+                  <a16:creationId xmlns:a16="http://schemas.microsoft.com/office/drawing/2014/main" id="{E338D32D-E716-4FA3-DA88-3F62BB0CDC86}"/>
+                </a:ext>
+              </a:extLst>
+            </p:cNvPr>
+            <p:cNvSpPr txBox="1"/>
+            <p:nvPr/>
+          </p:nvSpPr>
+          <p:spPr>
+            <a:xfrm>
+              <a:off x="2469303" y="4870012"/>
+              <a:ext cx="1065278" cy="336251"/>
+            </a:xfrm>
+            <a:prstGeom prst="rect">
+              <a:avLst/>
+            </a:prstGeom>
+            <a:noFill/>
+          </p:spPr>
+          <p:txBody>
+            <a:bodyPr wrap="square" rtlCol="0">
+              <a:spAutoFit/>
+            </a:bodyPr>
+            <a:lstStyle/>
+            <a:p>
+              <a:r>
+                <a:rPr lang="en-US" sz="1200" dirty="0">
+                  <a:latin typeface="Calibri" panose="020F0502020204030204" pitchFamily="34" charset="0"/>
+                  <a:ea typeface="Calibri" panose="020F0502020204030204" pitchFamily="34" charset="0"/>
+                  <a:cs typeface="Calibri" panose="020F0502020204030204" pitchFamily="34" charset="0"/>
+                </a:rPr>
+                <a:t>SuperDARN</a:t>
+              </a:r>
+            </a:p>
+          </p:txBody>
+        </p:sp>
+        <p:sp>
+          <p:nvSpPr>
+            <p:cNvPr id="91" name="TextBox 90">
+              <a:extLst>
+                <a:ext uri="{FF2B5EF4-FFF2-40B4-BE49-F238E27FC236}">
+                  <a16:creationId xmlns:a16="http://schemas.microsoft.com/office/drawing/2014/main" id="{1ABB0762-08C0-E6FB-B5C3-844916BF3C70}"/>
+                </a:ext>
+              </a:extLst>
+            </p:cNvPr>
+            <p:cNvSpPr txBox="1"/>
+            <p:nvPr/>
+          </p:nvSpPr>
+          <p:spPr>
+            <a:xfrm rot="1968219">
+              <a:off x="4418473" y="3233883"/>
+              <a:ext cx="2648447" cy="784586"/>
+            </a:xfrm>
+            <a:prstGeom prst="rect">
+              <a:avLst/>
+            </a:prstGeom>
+            <a:noFill/>
+          </p:spPr>
+          <p:txBody>
+            <a:bodyPr wrap="square" rtlCol="0">
+              <a:spAutoFit/>
+            </a:bodyPr>
+            <a:lstStyle/>
+            <a:p>
+              <a:r>
+                <a:rPr lang="en-US" dirty="0">
+                  <a:solidFill>
+                    <a:schemeClr val="accent5">
+                      <a:lumMod val="50000"/>
+                    </a:schemeClr>
+                  </a:solidFill>
+                  <a:latin typeface="Calibri" panose="020F0502020204030204" pitchFamily="34" charset="0"/>
+                  <a:ea typeface="Calibri" panose="020F0502020204030204" pitchFamily="34" charset="0"/>
+                  <a:cs typeface="Calibri" panose="020F0502020204030204" pitchFamily="34" charset="0"/>
+                </a:rPr>
+                <a:t>Ray-1: 1-hop E-region </a:t>
+              </a:r>
+            </a:p>
+            <a:p>
+              <a:r>
+                <a:rPr lang="en-US" dirty="0">
+                  <a:solidFill>
+                    <a:schemeClr val="accent5">
+                      <a:lumMod val="50000"/>
+                    </a:schemeClr>
+                  </a:solidFill>
+                  <a:latin typeface="Calibri" panose="020F0502020204030204" pitchFamily="34" charset="0"/>
+                  <a:ea typeface="Calibri" panose="020F0502020204030204" pitchFamily="34" charset="0"/>
+                  <a:cs typeface="Calibri" panose="020F0502020204030204" pitchFamily="34" charset="0"/>
+                </a:rPr>
+                <a:t>Ground Scatter</a:t>
+              </a:r>
+            </a:p>
+          </p:txBody>
+        </p:sp>
+        <p:sp>
+          <p:nvSpPr>
+            <p:cNvPr id="92" name="TextBox 91">
+              <a:extLst>
+                <a:ext uri="{FF2B5EF4-FFF2-40B4-BE49-F238E27FC236}">
+                  <a16:creationId xmlns:a16="http://schemas.microsoft.com/office/drawing/2014/main" id="{24EF8259-8D20-1CE8-52FE-3107EFE0EB36}"/>
+                </a:ext>
+              </a:extLst>
+            </p:cNvPr>
+            <p:cNvSpPr txBox="1"/>
+            <p:nvPr/>
+          </p:nvSpPr>
+          <p:spPr>
+            <a:xfrm rot="2638120">
+              <a:off x="6324291" y="3185573"/>
+              <a:ext cx="2640942" cy="784586"/>
+            </a:xfrm>
+            <a:prstGeom prst="rect">
+              <a:avLst/>
+            </a:prstGeom>
+            <a:noFill/>
+          </p:spPr>
+          <p:txBody>
+            <a:bodyPr wrap="square" rtlCol="0">
+              <a:spAutoFit/>
+            </a:bodyPr>
+            <a:lstStyle/>
+            <a:p>
+              <a:r>
+                <a:rPr lang="en-US" dirty="0">
+                  <a:solidFill>
+                    <a:srgbClr val="0070C0"/>
+                  </a:solidFill>
+                  <a:latin typeface="Calibri" panose="020F0502020204030204" pitchFamily="34" charset="0"/>
+                  <a:ea typeface="Calibri" panose="020F0502020204030204" pitchFamily="34" charset="0"/>
+                  <a:cs typeface="Calibri" panose="020F0502020204030204" pitchFamily="34" charset="0"/>
+                </a:rPr>
+                <a:t>Ray-2: 1-hop F-region </a:t>
+              </a:r>
+            </a:p>
+            <a:p>
+              <a:r>
+                <a:rPr lang="en-US" dirty="0">
+                  <a:solidFill>
+                    <a:srgbClr val="0070C0"/>
+                  </a:solidFill>
+                  <a:latin typeface="Calibri" panose="020F0502020204030204" pitchFamily="34" charset="0"/>
+                  <a:ea typeface="Calibri" panose="020F0502020204030204" pitchFamily="34" charset="0"/>
+                  <a:cs typeface="Calibri" panose="020F0502020204030204" pitchFamily="34" charset="0"/>
+                </a:rPr>
+                <a:t>Ground Scatter</a:t>
+              </a:r>
+            </a:p>
+          </p:txBody>
+        </p:sp>
+        <p:sp>
+          <p:nvSpPr>
+            <p:cNvPr id="93" name="TextBox 92">
+              <a:extLst>
+                <a:ext uri="{FF2B5EF4-FFF2-40B4-BE49-F238E27FC236}">
+                  <a16:creationId xmlns:a16="http://schemas.microsoft.com/office/drawing/2014/main" id="{ACBCB772-E711-D2B4-236B-3E92816A845D}"/>
+                </a:ext>
+              </a:extLst>
+            </p:cNvPr>
+            <p:cNvSpPr txBox="1"/>
+            <p:nvPr/>
+          </p:nvSpPr>
+          <p:spPr>
+            <a:xfrm rot="20529758">
+              <a:off x="2192838" y="2062295"/>
+              <a:ext cx="2665331" cy="784586"/>
+            </a:xfrm>
+            <a:prstGeom prst="rect">
+              <a:avLst/>
+            </a:prstGeom>
+            <a:noFill/>
+          </p:spPr>
+          <p:txBody>
+            <a:bodyPr wrap="square" rtlCol="0">
+              <a:spAutoFit/>
+            </a:bodyPr>
+            <a:lstStyle/>
+            <a:p>
+              <a:r>
+                <a:rPr lang="en-US" dirty="0">
+                  <a:solidFill>
+                    <a:srgbClr val="00B050"/>
+                  </a:solidFill>
+                  <a:latin typeface="Calibri" panose="020F0502020204030204" pitchFamily="34" charset="0"/>
+                  <a:ea typeface="Calibri" panose="020F0502020204030204" pitchFamily="34" charset="0"/>
+                  <a:cs typeface="Calibri" panose="020F0502020204030204" pitchFamily="34" charset="0"/>
+                </a:rPr>
+                <a:t>Ray-3: ½ hop F-region </a:t>
+              </a:r>
+            </a:p>
+            <a:p>
+              <a:r>
+                <a:rPr lang="en-US" dirty="0">
+                  <a:solidFill>
+                    <a:srgbClr val="00B050"/>
+                  </a:solidFill>
+                  <a:latin typeface="Calibri" panose="020F0502020204030204" pitchFamily="34" charset="0"/>
+                  <a:ea typeface="Calibri" panose="020F0502020204030204" pitchFamily="34" charset="0"/>
+                  <a:cs typeface="Calibri" panose="020F0502020204030204" pitchFamily="34" charset="0"/>
+                </a:rPr>
+                <a:t>Ionospheric Scatter</a:t>
+              </a:r>
+            </a:p>
+          </p:txBody>
+        </p:sp>
+        <p:cxnSp>
+          <p:nvCxnSpPr>
+            <p:cNvPr id="95" name="Straight Connector 94">
+              <a:extLst>
+                <a:ext uri="{FF2B5EF4-FFF2-40B4-BE49-F238E27FC236}">
+                  <a16:creationId xmlns:a16="http://schemas.microsoft.com/office/drawing/2014/main" id="{CB8B8835-70DB-27AC-5202-E95F150B75A7}"/>
+                </a:ext>
+              </a:extLst>
+            </p:cNvPr>
+            <p:cNvCxnSpPr>
+              <a:cxnSpLocks/>
+            </p:cNvCxnSpPr>
+            <p:nvPr/>
+          </p:nvCxnSpPr>
+          <p:spPr>
+            <a:xfrm>
+              <a:off x="4920312" y="1386835"/>
+              <a:ext cx="774081" cy="1384400"/>
+            </a:xfrm>
+            <a:prstGeom prst="line">
+              <a:avLst/>
+            </a:prstGeom>
+            <a:ln w="19050" cap="flat" cmpd="sng" algn="ctr">
+              <a:solidFill>
+                <a:schemeClr val="dk1"/>
+              </a:solidFill>
+              <a:prstDash val="dash"/>
+              <a:round/>
+              <a:headEnd type="none" w="med" len="med"/>
+              <a:tailEnd type="none" w="med" len="med"/>
+            </a:ln>
+          </p:spPr>
+          <p:style>
+            <a:lnRef idx="0">
+              <a:scrgbClr r="0" g="0" b="0"/>
+            </a:lnRef>
+            <a:fillRef idx="0">
+              <a:scrgbClr r="0" g="0" b="0"/>
+            </a:fillRef>
+            <a:effectRef idx="0">
+              <a:scrgbClr r="0" g="0" b="0"/>
+            </a:effectRef>
+            <a:fontRef idx="minor">
+              <a:schemeClr val="tx1"/>
+            </a:fontRef>
+          </p:style>
+        </p:cxnSp>
+        <p:sp>
+          <p:nvSpPr>
+            <p:cNvPr id="96" name="TextBox 95">
+              <a:extLst>
+                <a:ext uri="{FF2B5EF4-FFF2-40B4-BE49-F238E27FC236}">
+                  <a16:creationId xmlns:a16="http://schemas.microsoft.com/office/drawing/2014/main" id="{EF8A77DE-57EE-51AC-F563-24FB360D0057}"/>
+                </a:ext>
+              </a:extLst>
+            </p:cNvPr>
+            <p:cNvSpPr txBox="1"/>
+            <p:nvPr/>
+          </p:nvSpPr>
+          <p:spPr>
+            <a:xfrm>
+              <a:off x="5094719" y="1136844"/>
+              <a:ext cx="1445009" cy="448335"/>
+            </a:xfrm>
+            <a:prstGeom prst="rect">
+              <a:avLst/>
+            </a:prstGeom>
+            <a:noFill/>
+          </p:spPr>
+          <p:txBody>
+            <a:bodyPr wrap="square" rtlCol="0">
+              <a:spAutoFit/>
+            </a:bodyPr>
+            <a:lstStyle/>
+            <a:p>
+              <a:r>
+                <a:rPr lang="en-US" dirty="0">
+                  <a:latin typeface="Calibri" panose="020F0502020204030204" pitchFamily="34" charset="0"/>
+                  <a:ea typeface="Calibri" panose="020F0502020204030204" pitchFamily="34" charset="0"/>
+                  <a:cs typeface="Calibri" panose="020F0502020204030204" pitchFamily="34" charset="0"/>
+                </a:rPr>
+                <a:t>B-field Line</a:t>
+              </a:r>
+            </a:p>
+          </p:txBody>
+        </p:sp>
+        <p:sp>
+          <p:nvSpPr>
+            <p:cNvPr id="132" name="TextBox 131">
+              <a:extLst>
+                <a:ext uri="{FF2B5EF4-FFF2-40B4-BE49-F238E27FC236}">
+                  <a16:creationId xmlns:a16="http://schemas.microsoft.com/office/drawing/2014/main" id="{762FCC28-9649-A6D8-5CC4-7821F310E1CE}"/>
+                </a:ext>
+              </a:extLst>
+            </p:cNvPr>
+            <p:cNvSpPr txBox="1"/>
+            <p:nvPr/>
+          </p:nvSpPr>
+          <p:spPr>
+            <a:xfrm>
+              <a:off x="3594488" y="1447307"/>
+              <a:ext cx="533202" cy="448335"/>
+            </a:xfrm>
+            <a:prstGeom prst="rect">
+              <a:avLst/>
+            </a:prstGeom>
+            <a:noFill/>
+          </p:spPr>
+          <p:txBody>
+            <a:bodyPr wrap="square" rtlCol="0">
+              <a:spAutoFit/>
+            </a:bodyPr>
+            <a:lstStyle/>
+            <a:p>
+              <a:r>
+                <a:rPr lang="en-US" dirty="0"/>
+                <a:t>(A)</a:t>
+              </a:r>
+            </a:p>
+          </p:txBody>
+        </p:sp>
+      </p:grpSp>
+    </p:spTree>
+    <p:extLst>
+      <p:ext uri="{BB962C8B-B14F-4D97-AF65-F5344CB8AC3E}">
+        <p14:creationId xmlns:p14="http://schemas.microsoft.com/office/powerpoint/2010/main" val="2720587942"/>
+      </p:ext>
+    </p:extLst>
+  </p:cSld>
+  <p:clrMapOvr>
+    <a:masterClrMapping/>
+  </p:clrMapOvr>
+</p:sld>
+</file>
+
+<file path=ppt/slides/slide5.xml><?xml version="1.0" encoding="utf-8"?>
+<p:sld xmlns:a="http://schemas.openxmlformats.org/drawingml/2006/main" xmlns:r="http://schemas.openxmlformats.org/officeDocument/2006/relationships" xmlns:p="http://schemas.openxmlformats.org/presentationml/2006/main">
+  <p:cSld>
+    <p:spTree>
+      <p:nvGrpSpPr>
         <p:cNvPr id="1" name=""/>
         <p:cNvGrpSpPr/>
         <p:nvPr/>

--- a/paper-mstid-rt/pub_figures/TID.pptx
+++ b/paper-mstid-rt/pub_figures/TID.pptx
@@ -274,7 +274,7 @@
           <a:p>
             <a:fld id="{A9382490-085F-45B0-B756-BD60DC77582D}" type="datetimeFigureOut">
               <a:rPr lang="en-US" smtClean="0"/>
-              <a:t>9/2/2025</a:t>
+              <a:t>9/3/2025</a:t>
             </a:fld>
             <a:endParaRPr lang="en-US"/>
           </a:p>
@@ -472,7 +472,7 @@
           <a:p>
             <a:fld id="{A9382490-085F-45B0-B756-BD60DC77582D}" type="datetimeFigureOut">
               <a:rPr lang="en-US" smtClean="0"/>
-              <a:t>9/2/2025</a:t>
+              <a:t>9/3/2025</a:t>
             </a:fld>
             <a:endParaRPr lang="en-US"/>
           </a:p>
@@ -680,7 +680,7 @@
           <a:p>
             <a:fld id="{A9382490-085F-45B0-B756-BD60DC77582D}" type="datetimeFigureOut">
               <a:rPr lang="en-US" smtClean="0"/>
-              <a:t>9/2/2025</a:t>
+              <a:t>9/3/2025</a:t>
             </a:fld>
             <a:endParaRPr lang="en-US"/>
           </a:p>
@@ -878,7 +878,7 @@
           <a:p>
             <a:fld id="{A9382490-085F-45B0-B756-BD60DC77582D}" type="datetimeFigureOut">
               <a:rPr lang="en-US" smtClean="0"/>
-              <a:t>9/2/2025</a:t>
+              <a:t>9/3/2025</a:t>
             </a:fld>
             <a:endParaRPr lang="en-US"/>
           </a:p>
@@ -1153,7 +1153,7 @@
           <a:p>
             <a:fld id="{A9382490-085F-45B0-B756-BD60DC77582D}" type="datetimeFigureOut">
               <a:rPr lang="en-US" smtClean="0"/>
-              <a:t>9/2/2025</a:t>
+              <a:t>9/3/2025</a:t>
             </a:fld>
             <a:endParaRPr lang="en-US"/>
           </a:p>
@@ -1418,7 +1418,7 @@
           <a:p>
             <a:fld id="{A9382490-085F-45B0-B756-BD60DC77582D}" type="datetimeFigureOut">
               <a:rPr lang="en-US" smtClean="0"/>
-              <a:t>9/2/2025</a:t>
+              <a:t>9/3/2025</a:t>
             </a:fld>
             <a:endParaRPr lang="en-US"/>
           </a:p>
@@ -1830,7 +1830,7 @@
           <a:p>
             <a:fld id="{A9382490-085F-45B0-B756-BD60DC77582D}" type="datetimeFigureOut">
               <a:rPr lang="en-US" smtClean="0"/>
-              <a:t>9/2/2025</a:t>
+              <a:t>9/3/2025</a:t>
             </a:fld>
             <a:endParaRPr lang="en-US"/>
           </a:p>
@@ -1971,7 +1971,7 @@
           <a:p>
             <a:fld id="{A9382490-085F-45B0-B756-BD60DC77582D}" type="datetimeFigureOut">
               <a:rPr lang="en-US" smtClean="0"/>
-              <a:t>9/2/2025</a:t>
+              <a:t>9/3/2025</a:t>
             </a:fld>
             <a:endParaRPr lang="en-US"/>
           </a:p>
@@ -2084,7 +2084,7 @@
           <a:p>
             <a:fld id="{A9382490-085F-45B0-B756-BD60DC77582D}" type="datetimeFigureOut">
               <a:rPr lang="en-US" smtClean="0"/>
-              <a:t>9/2/2025</a:t>
+              <a:t>9/3/2025</a:t>
             </a:fld>
             <a:endParaRPr lang="en-US"/>
           </a:p>
@@ -2395,7 +2395,7 @@
           <a:p>
             <a:fld id="{A9382490-085F-45B0-B756-BD60DC77582D}" type="datetimeFigureOut">
               <a:rPr lang="en-US" smtClean="0"/>
-              <a:t>9/2/2025</a:t>
+              <a:t>9/3/2025</a:t>
             </a:fld>
             <a:endParaRPr lang="en-US"/>
           </a:p>
@@ -2683,7 +2683,7 @@
           <a:p>
             <a:fld id="{A9382490-085F-45B0-B756-BD60DC77582D}" type="datetimeFigureOut">
               <a:rPr lang="en-US" smtClean="0"/>
-              <a:t>9/2/2025</a:t>
+              <a:t>9/3/2025</a:t>
             </a:fld>
             <a:endParaRPr lang="en-US"/>
           </a:p>
@@ -2924,7 +2924,7 @@
           <a:p>
             <a:fld id="{A9382490-085F-45B0-B756-BD60DC77582D}" type="datetimeFigureOut">
               <a:rPr lang="en-US" smtClean="0"/>
-              <a:t>9/2/2025</a:t>
+              <a:t>9/3/2025</a:t>
             </a:fld>
             <a:endParaRPr lang="en-US"/>
           </a:p>
@@ -8732,10 +8732,10 @@
         </p:nvGrpSpPr>
         <p:grpSpPr>
           <a:xfrm>
-            <a:off x="2192838" y="1136844"/>
-            <a:ext cx="8127912" cy="4069419"/>
-            <a:chOff x="2192838" y="1136844"/>
-            <a:chExt cx="8127912" cy="4069419"/>
+            <a:off x="2192838" y="1332787"/>
+            <a:ext cx="8127912" cy="3873476"/>
+            <a:chOff x="2192838" y="1332787"/>
+            <a:chExt cx="8127912" cy="3873476"/>
           </a:xfrm>
         </p:grpSpPr>
         <p:grpSp>
@@ -9790,7 +9790,7 @@
           </p:nvSpPr>
           <p:spPr>
             <a:xfrm rot="258862">
-              <a:off x="7039992" y="4070354"/>
+              <a:off x="6158250" y="4070354"/>
               <a:ext cx="133776" cy="122279"/>
             </a:xfrm>
             <a:prstGeom prst="roundRect">
@@ -9882,8 +9882,8 @@
           </p:nvSpPr>
           <p:spPr>
             <a:xfrm>
-              <a:off x="3160480" y="2658050"/>
-              <a:ext cx="3886943" cy="1643553"/>
+              <a:off x="3175343" y="2918377"/>
+              <a:ext cx="2976225" cy="1366222"/>
             </a:xfrm>
             <a:custGeom>
               <a:avLst/>
@@ -10190,8 +10190,8 @@
           </p:nvSpPr>
           <p:spPr>
             <a:xfrm>
-              <a:off x="3175344" y="2135569"/>
-              <a:ext cx="2177580" cy="2150618"/>
+              <a:off x="3175343" y="2069436"/>
+              <a:ext cx="2267251" cy="2216751"/>
             </a:xfrm>
             <a:custGeom>
               <a:avLst/>
@@ -10368,7 +10368,7 @@
           </p:nvSpPr>
           <p:spPr>
             <a:xfrm rot="1968219">
-              <a:off x="4418473" y="3233883"/>
+              <a:off x="3695628" y="3583956"/>
               <a:ext cx="2648447" cy="784586"/>
             </a:xfrm>
             <a:prstGeom prst="rect">
@@ -10539,8 +10539,8 @@
           </p:nvCxnSpPr>
           <p:spPr>
             <a:xfrm>
-              <a:off x="4920312" y="1386835"/>
-              <a:ext cx="774081" cy="1384400"/>
+              <a:off x="4920312" y="1506581"/>
+              <a:ext cx="1019742" cy="1176918"/>
             </a:xfrm>
             <a:prstGeom prst="line">
               <a:avLst/>
@@ -10584,7 +10584,7 @@
           </p:nvSpPr>
           <p:spPr>
             <a:xfrm>
-              <a:off x="5094719" y="1136844"/>
+              <a:off x="5007633" y="1332787"/>
               <a:ext cx="1445009" cy="448335"/>
             </a:xfrm>
             <a:prstGeom prst="rect">
